--- a/rus/UrFU/SberML/2023/Presentations/Лекция 1.04  - Регуляризация и Отбор гиперпараметров.pptx
+++ b/rus/UrFU/SberML/2023/Presentations/Лекция 1.04  - Регуляризация и Отбор гиперпараметров.pptx
@@ -14,15 +14,15 @@
     <p:sldId id="469" r:id="rId5"/>
     <p:sldId id="520" r:id="rId6"/>
     <p:sldId id="479" r:id="rId7"/>
-    <p:sldId id="460" r:id="rId8"/>
-    <p:sldId id="465" r:id="rId9"/>
-    <p:sldId id="466" r:id="rId10"/>
+    <p:sldId id="532" r:id="rId8"/>
+    <p:sldId id="533" r:id="rId9"/>
+    <p:sldId id="534" r:id="rId10"/>
     <p:sldId id="522" r:id="rId11"/>
     <p:sldId id="480" r:id="rId12"/>
     <p:sldId id="518" r:id="rId13"/>
     <p:sldId id="481" r:id="rId14"/>
     <p:sldId id="521" r:id="rId15"/>
-    <p:sldId id="523" r:id="rId16"/>
+    <p:sldId id="535" r:id="rId16"/>
     <p:sldId id="524" r:id="rId17"/>
     <p:sldId id="525" r:id="rId18"/>
     <p:sldId id="526" r:id="rId19"/>
@@ -231,7 +231,7 @@
           <a:p>
             <a:fld id="{FC905E3C-4BAB-4A96-A922-7BFAEF974B87}" type="datetimeFigureOut">
               <a:rPr lang="ru-RU" smtClean="0"/>
-              <a:t>02.10.2023</a:t>
+              <a:t>22.09.2025</a:t>
             </a:fld>
             <a:endParaRPr lang="ru-RU"/>
           </a:p>
@@ -1052,7 +1052,7 @@
     </p:spTree>
     <p:extLst>
       <p:ext uri="{BB962C8B-B14F-4D97-AF65-F5344CB8AC3E}">
-        <p14:creationId xmlns:p14="http://schemas.microsoft.com/office/powerpoint/2010/main" val="2444045981"/>
+        <p14:creationId xmlns:p14="http://schemas.microsoft.com/office/powerpoint/2010/main" val="3020244393"/>
       </p:ext>
     </p:extLst>
   </p:cSld>
@@ -2368,7 +2368,7 @@
     </p:spTree>
     <p:extLst>
       <p:ext uri="{BB962C8B-B14F-4D97-AF65-F5344CB8AC3E}">
-        <p14:creationId xmlns:p14="http://schemas.microsoft.com/office/powerpoint/2010/main" val="1870013308"/>
+        <p14:creationId xmlns:p14="http://schemas.microsoft.com/office/powerpoint/2010/main" val="1848714748"/>
       </p:ext>
     </p:extLst>
   </p:cSld>
@@ -2462,7 +2462,7 @@
     </p:spTree>
     <p:extLst>
       <p:ext uri="{BB962C8B-B14F-4D97-AF65-F5344CB8AC3E}">
-        <p14:creationId xmlns:p14="http://schemas.microsoft.com/office/powerpoint/2010/main" val="3999243184"/>
+        <p14:creationId xmlns:p14="http://schemas.microsoft.com/office/powerpoint/2010/main" val="3101917836"/>
       </p:ext>
     </p:extLst>
   </p:cSld>
@@ -2556,7 +2556,7 @@
     </p:spTree>
     <p:extLst>
       <p:ext uri="{BB962C8B-B14F-4D97-AF65-F5344CB8AC3E}">
-        <p14:creationId xmlns:p14="http://schemas.microsoft.com/office/powerpoint/2010/main" val="21773308"/>
+        <p14:creationId xmlns:p14="http://schemas.microsoft.com/office/powerpoint/2010/main" val="305544203"/>
       </p:ext>
     </p:extLst>
   </p:cSld>
@@ -2839,7 +2839,7 @@
           <a:p>
             <a:fld id="{894D7FE9-E167-4C1A-9882-ED30199F1B66}" type="datetimeFigureOut">
               <a:rPr lang="ru-RU" smtClean="0"/>
-              <a:t>02.10.2023</a:t>
+              <a:t>22.09.2025</a:t>
             </a:fld>
             <a:endParaRPr lang="ru-RU"/>
           </a:p>
@@ -3007,7 +3007,7 @@
           <a:p>
             <a:fld id="{894D7FE9-E167-4C1A-9882-ED30199F1B66}" type="datetimeFigureOut">
               <a:rPr lang="ru-RU" smtClean="0"/>
-              <a:t>02.10.2023</a:t>
+              <a:t>22.09.2025</a:t>
             </a:fld>
             <a:endParaRPr lang="ru-RU"/>
           </a:p>
@@ -3185,7 +3185,7 @@
           <a:p>
             <a:fld id="{894D7FE9-E167-4C1A-9882-ED30199F1B66}" type="datetimeFigureOut">
               <a:rPr lang="ru-RU" smtClean="0"/>
-              <a:t>02.10.2023</a:t>
+              <a:t>22.09.2025</a:t>
             </a:fld>
             <a:endParaRPr lang="ru-RU"/>
           </a:p>
@@ -3353,7 +3353,7 @@
           <a:p>
             <a:fld id="{894D7FE9-E167-4C1A-9882-ED30199F1B66}" type="datetimeFigureOut">
               <a:rPr lang="ru-RU" smtClean="0"/>
-              <a:t>02.10.2023</a:t>
+              <a:t>22.09.2025</a:t>
             </a:fld>
             <a:endParaRPr lang="ru-RU"/>
           </a:p>
@@ -3598,7 +3598,7 @@
           <a:p>
             <a:fld id="{894D7FE9-E167-4C1A-9882-ED30199F1B66}" type="datetimeFigureOut">
               <a:rPr lang="ru-RU" smtClean="0"/>
-              <a:t>02.10.2023</a:t>
+              <a:t>22.09.2025</a:t>
             </a:fld>
             <a:endParaRPr lang="ru-RU"/>
           </a:p>
@@ -3883,7 +3883,7 @@
           <a:p>
             <a:fld id="{894D7FE9-E167-4C1A-9882-ED30199F1B66}" type="datetimeFigureOut">
               <a:rPr lang="ru-RU" smtClean="0"/>
-              <a:t>02.10.2023</a:t>
+              <a:t>22.09.2025</a:t>
             </a:fld>
             <a:endParaRPr lang="ru-RU"/>
           </a:p>
@@ -4302,7 +4302,7 @@
           <a:p>
             <a:fld id="{894D7FE9-E167-4C1A-9882-ED30199F1B66}" type="datetimeFigureOut">
               <a:rPr lang="ru-RU" smtClean="0"/>
-              <a:t>02.10.2023</a:t>
+              <a:t>22.09.2025</a:t>
             </a:fld>
             <a:endParaRPr lang="ru-RU"/>
           </a:p>
@@ -4419,7 +4419,7 @@
           <a:p>
             <a:fld id="{894D7FE9-E167-4C1A-9882-ED30199F1B66}" type="datetimeFigureOut">
               <a:rPr lang="ru-RU" smtClean="0"/>
-              <a:t>02.10.2023</a:t>
+              <a:t>22.09.2025</a:t>
             </a:fld>
             <a:endParaRPr lang="ru-RU"/>
           </a:p>
@@ -4514,7 +4514,7 @@
           <a:p>
             <a:fld id="{894D7FE9-E167-4C1A-9882-ED30199F1B66}" type="datetimeFigureOut">
               <a:rPr lang="ru-RU" smtClean="0"/>
-              <a:t>02.10.2023</a:t>
+              <a:t>22.09.2025</a:t>
             </a:fld>
             <a:endParaRPr lang="ru-RU"/>
           </a:p>
@@ -4789,7 +4789,7 @@
           <a:p>
             <a:fld id="{894D7FE9-E167-4C1A-9882-ED30199F1B66}" type="datetimeFigureOut">
               <a:rPr lang="ru-RU" smtClean="0"/>
-              <a:t>02.10.2023</a:t>
+              <a:t>22.09.2025</a:t>
             </a:fld>
             <a:endParaRPr lang="ru-RU"/>
           </a:p>
@@ -5041,7 +5041,7 @@
           <a:p>
             <a:fld id="{894D7FE9-E167-4C1A-9882-ED30199F1B66}" type="datetimeFigureOut">
               <a:rPr lang="ru-RU" smtClean="0"/>
-              <a:t>02.10.2023</a:t>
+              <a:t>22.09.2025</a:t>
             </a:fld>
             <a:endParaRPr lang="ru-RU"/>
           </a:p>
@@ -5255,7 +5255,7 @@
           <a:p>
             <a:fld id="{894D7FE9-E167-4C1A-9882-ED30199F1B66}" type="datetimeFigureOut">
               <a:rPr lang="ru-RU" smtClean="0"/>
-              <a:t>02.10.2023</a:t>
+              <a:t>22.09.2025</a:t>
             </a:fld>
             <a:endParaRPr lang="ru-RU"/>
           </a:p>
@@ -10918,6 +10918,60 @@
           </a:p>
         </p:txBody>
       </p:sp>
+      <p:sp>
+        <p:nvSpPr>
+          <p:cNvPr id="12" name="Нижний колонтитул 6"/>
+          <p:cNvSpPr>
+            <a:spLocks noGrp="1"/>
+          </p:cNvSpPr>
+          <p:nvPr>
+            <p:ph type="ftr" idx="4294967295"/>
+          </p:nvPr>
+        </p:nvSpPr>
+        <p:spPr>
+          <a:xfrm>
+            <a:off x="1703512" y="176904"/>
+            <a:ext cx="8620890" cy="520826"/>
+          </a:xfrm>
+          <a:prstGeom prst="rect">
+            <a:avLst/>
+          </a:prstGeom>
+        </p:spPr>
+        <p:txBody>
+          <a:bodyPr/>
+          <a:lstStyle/>
+          <a:p>
+            <a:pPr algn="ctr"/>
+            <a:r>
+              <a:rPr lang="ru-RU" sz="3200" b="1" spc="-1" dirty="0">
+                <a:solidFill>
+                  <a:schemeClr val="bg1"/>
+                </a:solidFill>
+                <a:latin typeface="Verdana" panose="020B0604030504040204" pitchFamily="34" charset="0"/>
+                <a:ea typeface="Verdana" panose="020B0604030504040204" pitchFamily="34" charset="0"/>
+              </a:rPr>
+              <a:t>Параметры и </a:t>
+            </a:r>
+            <a:r>
+              <a:rPr lang="ru-RU" sz="3200" b="1" spc="-1" dirty="0" err="1">
+                <a:solidFill>
+                  <a:schemeClr val="bg1"/>
+                </a:solidFill>
+                <a:latin typeface="Verdana" panose="020B0604030504040204" pitchFamily="34" charset="0"/>
+                <a:ea typeface="Verdana" panose="020B0604030504040204" pitchFamily="34" charset="0"/>
+              </a:rPr>
+              <a:t>гиперпараметры</a:t>
+            </a:r>
+            <a:endParaRPr lang="ru-RU" sz="3200" b="1" spc="-1" dirty="0">
+              <a:solidFill>
+                <a:schemeClr val="bg1"/>
+              </a:solidFill>
+              <a:latin typeface="Verdana" panose="020B0604030504040204" pitchFamily="34" charset="0"/>
+              <a:ea typeface="Verdana" panose="020B0604030504040204" pitchFamily="34" charset="0"/>
+            </a:endParaRPr>
+          </a:p>
+        </p:txBody>
+      </p:sp>
       <p:pic>
         <p:nvPicPr>
           <p:cNvPr id="14" name="Picture 2"/>
@@ -11074,8 +11128,8 @@
             </p:nvSpPr>
             <p:spPr>
               <a:xfrm>
-                <a:off x="479376" y="1052736"/>
-                <a:ext cx="8257069" cy="584775"/>
+                <a:off x="648953" y="1341215"/>
+                <a:ext cx="8315290" cy="584775"/>
               </a:xfrm>
               <a:prstGeom prst="rect">
                 <a:avLst/>
@@ -11135,7 +11189,7 @@
                         <a:latin typeface="Cambria Math" panose="02040503050406030204" pitchFamily="18" charset="0"/>
                         <a:ea typeface="Verdana" panose="020B0604030504040204" pitchFamily="34" charset="0"/>
                       </a:rPr>
-                      <m:t>𝑓</m:t>
+                      <m:t>𝑎</m:t>
                     </m:r>
                     <m:d>
                       <m:dPr>
@@ -11198,9 +11252,9 @@
                           <m:t>,</m:t>
                         </m:r>
                         <m:r>
-                          <a:rPr lang="en-US" sz="3200" i="1" dirty="0">
+                          <a:rPr lang="en-US" sz="3200" i="1" dirty="0" smtClean="0">
                             <a:solidFill>
-                              <a:schemeClr val="bg1"/>
+                              <a:srgbClr val="00B0F0"/>
                             </a:solidFill>
                             <a:latin typeface="Cambria Math" panose="02040503050406030204" pitchFamily="18" charset="0"/>
                             <a:ea typeface="Verdana" panose="020B0604030504040204" pitchFamily="34" charset="0"/>
@@ -11218,9 +11272,9 @@
                           <m:t>,</m:t>
                         </m:r>
                         <m:r>
-                          <a:rPr lang="en-US" sz="3200" i="1" dirty="0">
+                          <a:rPr lang="en-US" sz="3200" i="1" dirty="0" smtClean="0">
                             <a:solidFill>
-                              <a:schemeClr val="bg1"/>
+                              <a:srgbClr val="FF0000"/>
                             </a:solidFill>
                             <a:latin typeface="Cambria Math" panose="02040503050406030204" pitchFamily="18" charset="0"/>
                             <a:ea typeface="Verdana" panose="020B0604030504040204" pitchFamily="34" charset="0"/>
@@ -11274,8 +11328,8 @@
             </p:nvSpPr>
             <p:spPr>
               <a:xfrm>
-                <a:off x="479376" y="1052736"/>
-                <a:ext cx="8257069" cy="584775"/>
+                <a:off x="648953" y="1341215"/>
+                <a:ext cx="8315290" cy="584775"/>
               </a:xfrm>
               <a:prstGeom prst="rect">
                 <a:avLst/>
@@ -11283,7 +11337,7 @@
               <a:blipFill>
                 <a:blip r:embed="rId4"/>
                 <a:stretch>
-                  <a:fillRect b="-12500"/>
+                  <a:fillRect b="-11458"/>
                 </a:stretch>
               </a:blipFill>
             </p:spPr>
@@ -11318,8 +11372,8 @@
             </p:nvSpPr>
             <p:spPr>
               <a:xfrm>
-                <a:off x="479376" y="1700808"/>
-                <a:ext cx="8676606" cy="573427"/>
+                <a:off x="516161" y="1931358"/>
+                <a:ext cx="7692362" cy="573427"/>
               </a:xfrm>
               <a:prstGeom prst="rect">
                 <a:avLst/>
@@ -11337,7 +11391,7 @@
                     <m:r>
                       <a:rPr lang="en-US" sz="3200" b="0" i="1" dirty="0" smtClean="0">
                         <a:solidFill>
-                          <a:schemeClr val="bg1"/>
+                          <a:srgbClr val="00B0F0"/>
                         </a:solidFill>
                         <a:latin typeface="Cambria Math" panose="02040503050406030204" pitchFamily="18" charset="0"/>
                         <a:ea typeface="Verdana" panose="020B0604030504040204" pitchFamily="34" charset="0"/>
@@ -11441,8 +11495,8 @@
             </p:nvSpPr>
             <p:spPr>
               <a:xfrm>
-                <a:off x="479376" y="1700808"/>
-                <a:ext cx="8676606" cy="573427"/>
+                <a:off x="516161" y="1931358"/>
+                <a:ext cx="7692362" cy="573427"/>
               </a:xfrm>
               <a:prstGeom prst="rect">
                 <a:avLst/>
@@ -11450,7 +11504,7 @@
               <a:blipFill>
                 <a:blip r:embed="rId5"/>
                 <a:stretch>
-                  <a:fillRect b="-12766"/>
+                  <a:fillRect b="-11702"/>
                 </a:stretch>
               </a:blipFill>
             </p:spPr>
@@ -11485,8 +11539,8 @@
             </p:nvSpPr>
             <p:spPr>
               <a:xfrm>
-                <a:off x="623392" y="2852936"/>
-                <a:ext cx="7350667" cy="573427"/>
+                <a:off x="443027" y="3174827"/>
+                <a:ext cx="6448175" cy="573427"/>
               </a:xfrm>
               <a:prstGeom prst="rect">
                 <a:avLst/>
@@ -11504,7 +11558,7 @@
                     <m:r>
                       <a:rPr lang="en-US" sz="3200" b="0" i="1" dirty="0" smtClean="0">
                         <a:solidFill>
-                          <a:schemeClr val="bg1"/>
+                          <a:srgbClr val="FF0000"/>
                         </a:solidFill>
                         <a:latin typeface="Cambria Math" panose="02040503050406030204" pitchFamily="18" charset="0"/>
                         <a:ea typeface="Verdana" panose="020B0604030504040204" pitchFamily="34" charset="0"/>
@@ -11608,8 +11662,8 @@
             </p:nvSpPr>
             <p:spPr>
               <a:xfrm>
-                <a:off x="623392" y="2852936"/>
-                <a:ext cx="7350667" cy="573427"/>
+                <a:off x="443027" y="3174827"/>
+                <a:ext cx="6448175" cy="573427"/>
               </a:xfrm>
               <a:prstGeom prst="rect">
                 <a:avLst/>
@@ -11617,7 +11671,7 @@
               <a:blipFill>
                 <a:blip r:embed="rId6"/>
                 <a:stretch>
-                  <a:fillRect b="-12766"/>
+                  <a:fillRect b="-11702"/>
                 </a:stretch>
               </a:blipFill>
             </p:spPr>
@@ -11654,13 +11708,13 @@
         </p:nvSpPr>
         <p:spPr>
           <a:xfrm>
-            <a:off x="1919536" y="-23505"/>
+            <a:off x="1919398" y="529934"/>
             <a:ext cx="7920880" cy="827739"/>
           </a:xfrm>
         </p:spPr>
         <p:txBody>
           <a:bodyPr>
-            <a:normAutofit/>
+            <a:noAutofit/>
           </a:bodyPr>
           <a:lstStyle/>
           <a:p>
@@ -11668,20 +11722,49 @@
               <a:buNone/>
             </a:pPr>
             <a:r>
-              <a:rPr lang="ru-RU" sz="4000" b="1" dirty="0" smtClean="0">
+              <a:rPr lang="en-US" sz="3200" dirty="0">
                 <a:solidFill>
                   <a:schemeClr val="bg1"/>
                 </a:solidFill>
-                <a:latin typeface="Verdana" panose="020B0604030504040204" pitchFamily="34" charset="0"/>
+                <a:latin typeface="Montserrat" panose="020B0604020202020204" charset="-52"/>
                 <a:ea typeface="Verdana" panose="020B0604030504040204" pitchFamily="34" charset="0"/>
               </a:rPr>
-              <a:t>Модель</a:t>
+              <a:t/>
             </a:r>
-            <a:endParaRPr lang="ru-RU" sz="4000" b="1" dirty="0">
+            <a:br>
+              <a:rPr lang="en-US" sz="3200" dirty="0">
+                <a:solidFill>
+                  <a:schemeClr val="bg1"/>
+                </a:solidFill>
+                <a:latin typeface="Montserrat" panose="020B0604020202020204" charset="-52"/>
+                <a:ea typeface="Verdana" panose="020B0604030504040204" pitchFamily="34" charset="0"/>
+              </a:rPr>
+            </a:br>
+            <a:r>
+              <a:rPr lang="ru-RU" sz="3200" dirty="0" smtClean="0">
+                <a:solidFill>
+                  <a:schemeClr val="bg1"/>
+                </a:solidFill>
+                <a:latin typeface="Montserrat" panose="020B0604020202020204" charset="-52"/>
+                <a:ea typeface="Verdana" panose="020B0604030504040204" pitchFamily="34" charset="0"/>
+              </a:rPr>
+              <a:t>Линейная </a:t>
+            </a:r>
+            <a:r>
+              <a:rPr lang="ru-RU" sz="2800" dirty="0" smtClean="0">
+                <a:solidFill>
+                  <a:schemeClr val="bg1"/>
+                </a:solidFill>
+                <a:latin typeface="Montserrat" panose="020B0604020202020204" charset="-52"/>
+                <a:ea typeface="Verdana" panose="020B0604030504040204" pitchFamily="34" charset="0"/>
+              </a:rPr>
+              <a:t>Регрессия</a:t>
+            </a:r>
+            <a:endParaRPr lang="ru-RU" sz="2800" dirty="0">
               <a:solidFill>
                 <a:schemeClr val="bg1"/>
               </a:solidFill>
-              <a:latin typeface="Verdana" panose="020B0604030504040204" pitchFamily="34" charset="0"/>
+              <a:latin typeface="Montserrat" panose="020B0604020202020204" charset="-52"/>
               <a:ea typeface="Verdana" panose="020B0604030504040204" pitchFamily="34" charset="0"/>
             </a:endParaRPr>
           </a:p>
@@ -11703,8 +11786,8 @@
             </p:nvSpPr>
             <p:spPr>
               <a:xfrm>
-                <a:off x="1055440" y="2204864"/>
-                <a:ext cx="3440044" cy="646331"/>
+                <a:off x="3647728" y="2564904"/>
+                <a:ext cx="3591303" cy="646331"/>
               </a:xfrm>
               <a:prstGeom prst="rect">
                 <a:avLst/>
@@ -11727,7 +11810,7 @@
                         <m:accPr>
                           <m:chr m:val="̂"/>
                           <m:ctrlPr>
-                            <a:rPr lang="en-US" sz="3600" i="1" smtClean="0">
+                            <a:rPr lang="en-US" sz="3600" b="1" i="1">
                               <a:solidFill>
                                 <a:schemeClr val="bg1"/>
                               </a:solidFill>
@@ -11738,14 +11821,14 @@
                         </m:accPr>
                         <m:e>
                           <m:r>
-                            <a:rPr lang="en-US" sz="3600" i="1">
+                            <a:rPr lang="en-US" sz="3600" b="1" i="1">
                               <a:solidFill>
                                 <a:schemeClr val="bg1"/>
                               </a:solidFill>
                               <a:latin typeface="Cambria Math" panose="02040503050406030204" pitchFamily="18" charset="0"/>
                               <a:ea typeface="Verdana" panose="020B0604030504040204" pitchFamily="34" charset="0"/>
                             </a:rPr>
-                            <m:t>𝑦</m:t>
+                            <m:t>𝒚</m:t>
                           </m:r>
                         </m:e>
                       </m:acc>
@@ -11762,9 +11845,9 @@
                       <m:sSub>
                         <m:sSubPr>
                           <m:ctrlPr>
-                            <a:rPr lang="en-US" sz="3600" i="1">
+                            <a:rPr lang="en-US" sz="3600" i="1" smtClean="0">
                               <a:solidFill>
-                                <a:schemeClr val="bg1"/>
+                                <a:srgbClr val="00B0F0"/>
                               </a:solidFill>
                               <a:latin typeface="Cambria Math" panose="02040503050406030204" pitchFamily="18" charset="0"/>
                               <a:ea typeface="Verdana" panose="020B0604030504040204" pitchFamily="34" charset="0"/>
@@ -11775,7 +11858,7 @@
                           <m:r>
                             <a:rPr lang="en-US" sz="3600" i="1">
                               <a:solidFill>
-                                <a:schemeClr val="bg1"/>
+                                <a:srgbClr val="00B0F0"/>
                               </a:solidFill>
                               <a:latin typeface="Cambria Math" panose="02040503050406030204" pitchFamily="18" charset="0"/>
                               <a:ea typeface="Verdana" panose="020B0604030504040204" pitchFamily="34" charset="0"/>
@@ -11787,7 +11870,7 @@
                           <m:r>
                             <a:rPr lang="en-US" sz="3600" i="1">
                               <a:solidFill>
-                                <a:schemeClr val="bg1"/>
+                                <a:srgbClr val="00B0F0"/>
                               </a:solidFill>
                               <a:latin typeface="Cambria Math" panose="02040503050406030204" pitchFamily="18" charset="0"/>
                               <a:ea typeface="Verdana" panose="020B0604030504040204" pitchFamily="34" charset="0"/>
@@ -11807,7 +11890,7 @@
                         <m:t>+</m:t>
                       </m:r>
                       <m:r>
-                        <a:rPr lang="en-US" sz="3600" b="0" i="1" smtClean="0">
+                        <a:rPr lang="en-US" sz="3600" i="1">
                           <a:solidFill>
                             <a:schemeClr val="bg1"/>
                           </a:solidFill>
@@ -11829,9 +11912,9 @@
                       <m:sSup>
                         <m:sSupPr>
                           <m:ctrlPr>
-                            <a:rPr lang="en-US" sz="3600" b="0" i="1" smtClean="0">
+                            <a:rPr lang="en-US" sz="3600" i="1" smtClean="0">
                               <a:solidFill>
-                                <a:schemeClr val="bg1"/>
+                                <a:srgbClr val="00B0F0"/>
                               </a:solidFill>
                               <a:latin typeface="Cambria Math" panose="02040503050406030204" pitchFamily="18" charset="0"/>
                               <a:ea typeface="Verdana" panose="020B0604030504040204" pitchFamily="34" charset="0"/>
@@ -11840,9 +11923,9 @@
                         </m:sSupPr>
                         <m:e>
                           <m:r>
-                            <a:rPr lang="en-US" sz="3600" b="1" i="1" smtClean="0">
+                            <a:rPr lang="en-US" sz="3600" b="1" i="1">
                               <a:solidFill>
-                                <a:schemeClr val="bg1"/>
+                                <a:srgbClr val="00B0F0"/>
                               </a:solidFill>
                               <a:latin typeface="Cambria Math" panose="02040503050406030204" pitchFamily="18" charset="0"/>
                               <a:ea typeface="Verdana" panose="020B0604030504040204" pitchFamily="34" charset="0"/>
@@ -11852,7 +11935,7 @@
                         </m:e>
                         <m:sup>
                           <m:r>
-                            <a:rPr lang="en-US" sz="3600" b="0" i="1" smtClean="0">
+                            <a:rPr lang="en-US" sz="3600" i="1" smtClean="0">
                               <a:solidFill>
                                 <a:schemeClr val="bg1"/>
                               </a:solidFill>
@@ -11894,8 +11977,8 @@
             </p:nvSpPr>
             <p:spPr>
               <a:xfrm>
-                <a:off x="1055440" y="2204864"/>
-                <a:ext cx="3440044" cy="646331"/>
+                <a:off x="3647728" y="2564904"/>
+                <a:ext cx="3591303" cy="646331"/>
               </a:xfrm>
               <a:prstGeom prst="rect">
                 <a:avLst/>
@@ -11938,7 +12021,7 @@
             </p:nvSpPr>
             <p:spPr>
               <a:xfrm>
-                <a:off x="1199456" y="3573016"/>
+                <a:off x="551384" y="6237312"/>
                 <a:ext cx="5788123" cy="523220"/>
               </a:xfrm>
               <a:prstGeom prst="rect">
@@ -12000,7 +12083,7 @@
                           <m:ctrlPr>
                             <a:rPr lang="en-US" sz="2800" i="1" smtClean="0">
                               <a:solidFill>
-                                <a:schemeClr val="bg1"/>
+                                <a:srgbClr val="00B0F0"/>
                               </a:solidFill>
                               <a:latin typeface="Cambria Math" panose="02040503050406030204" pitchFamily="18" charset="0"/>
                               <a:ea typeface="Verdana" panose="020B0604030504040204" pitchFamily="34" charset="0"/>
@@ -12011,7 +12094,7 @@
                           <m:r>
                             <a:rPr lang="en-US" sz="2800" i="1">
                               <a:solidFill>
-                                <a:schemeClr val="bg1"/>
+                                <a:srgbClr val="00B0F0"/>
                               </a:solidFill>
                               <a:latin typeface="Cambria Math" panose="02040503050406030204" pitchFamily="18" charset="0"/>
                               <a:ea typeface="Verdana" panose="020B0604030504040204" pitchFamily="34" charset="0"/>
@@ -12023,7 +12106,7 @@
                           <m:r>
                             <a:rPr lang="en-US" sz="2800" b="0" i="1" smtClean="0">
                               <a:solidFill>
-                                <a:schemeClr val="bg1"/>
+                                <a:srgbClr val="00B0F0"/>
                               </a:solidFill>
                               <a:latin typeface="Cambria Math" panose="02040503050406030204" pitchFamily="18" charset="0"/>
                               <a:ea typeface="Verdana" panose="020B0604030504040204" pitchFamily="34" charset="0"/>
@@ -12045,7 +12128,7 @@
                       <m:r>
                         <a:rPr lang="en-US" sz="2800" b="0" i="1" baseline="30000" smtClean="0">
                           <a:solidFill>
-                            <a:schemeClr val="bg1"/>
+                            <a:srgbClr val="FF0000"/>
                           </a:solidFill>
                           <a:latin typeface="Cambria Math" panose="02040503050406030204" pitchFamily="18" charset="0"/>
                           <a:ea typeface="Verdana" panose="020B0604030504040204" pitchFamily="34" charset="0"/>
@@ -12065,9 +12148,9 @@
                       <m:sSub>
                         <m:sSubPr>
                           <m:ctrlPr>
-                            <a:rPr lang="en-US" sz="2800" i="1">
+                            <a:rPr lang="en-US" sz="2800" i="1" smtClean="0">
                               <a:solidFill>
-                                <a:schemeClr val="bg1"/>
+                                <a:srgbClr val="00B0F0"/>
                               </a:solidFill>
                               <a:latin typeface="Cambria Math" panose="02040503050406030204" pitchFamily="18" charset="0"/>
                               <a:ea typeface="Verdana" panose="020B0604030504040204" pitchFamily="34" charset="0"/>
@@ -12078,7 +12161,7 @@
                           <m:r>
                             <a:rPr lang="en-US" sz="2800" i="1">
                               <a:solidFill>
-                                <a:schemeClr val="bg1"/>
+                                <a:srgbClr val="00B0F0"/>
                               </a:solidFill>
                               <a:latin typeface="Cambria Math" panose="02040503050406030204" pitchFamily="18" charset="0"/>
                               <a:ea typeface="Verdana" panose="020B0604030504040204" pitchFamily="34" charset="0"/>
@@ -12090,7 +12173,7 @@
                           <m:r>
                             <a:rPr lang="en-US" sz="2800" b="0" i="1" smtClean="0">
                               <a:solidFill>
-                                <a:schemeClr val="bg1"/>
+                                <a:srgbClr val="00B0F0"/>
                               </a:solidFill>
                               <a:latin typeface="Cambria Math" panose="02040503050406030204" pitchFamily="18" charset="0"/>
                               <a:ea typeface="Verdana" panose="020B0604030504040204" pitchFamily="34" charset="0"/>
@@ -12112,7 +12195,7 @@
                       <m:r>
                         <a:rPr lang="en-US" sz="2800" b="0" i="1" baseline="30000" smtClean="0">
                           <a:solidFill>
-                            <a:schemeClr val="bg1"/>
+                            <a:srgbClr val="FF0000"/>
                           </a:solidFill>
                           <a:latin typeface="Cambria Math" panose="02040503050406030204" pitchFamily="18" charset="0"/>
                           <a:ea typeface="Verdana" panose="020B0604030504040204" pitchFamily="34" charset="0"/>
@@ -12132,9 +12215,9 @@
                       <m:sSub>
                         <m:sSubPr>
                           <m:ctrlPr>
-                            <a:rPr lang="en-US" sz="2800" i="1">
+                            <a:rPr lang="en-US" sz="2800" i="1" smtClean="0">
                               <a:solidFill>
-                                <a:schemeClr val="bg1"/>
+                                <a:srgbClr val="00B0F0"/>
                               </a:solidFill>
                               <a:latin typeface="Cambria Math" panose="02040503050406030204" pitchFamily="18" charset="0"/>
                               <a:ea typeface="Verdana" panose="020B0604030504040204" pitchFamily="34" charset="0"/>
@@ -12145,7 +12228,7 @@
                           <m:r>
                             <a:rPr lang="en-US" sz="2800" i="1">
                               <a:solidFill>
-                                <a:schemeClr val="bg1"/>
+                                <a:srgbClr val="00B0F0"/>
                               </a:solidFill>
                               <a:latin typeface="Cambria Math" panose="02040503050406030204" pitchFamily="18" charset="0"/>
                               <a:ea typeface="Verdana" panose="020B0604030504040204" pitchFamily="34" charset="0"/>
@@ -12157,7 +12240,7 @@
                           <m:r>
                             <a:rPr lang="en-US" sz="2800" b="0" i="1" smtClean="0">
                               <a:solidFill>
-                                <a:schemeClr val="bg1"/>
+                                <a:srgbClr val="00B0F0"/>
                               </a:solidFill>
                               <a:latin typeface="Cambria Math" panose="02040503050406030204" pitchFamily="18" charset="0"/>
                               <a:ea typeface="Verdana" panose="020B0604030504040204" pitchFamily="34" charset="0"/>
@@ -12179,7 +12262,7 @@
                       <m:r>
                         <a:rPr lang="en-US" sz="2800" b="0" i="1" baseline="30000" smtClean="0">
                           <a:solidFill>
-                            <a:schemeClr val="bg1"/>
+                            <a:srgbClr val="FF0000"/>
                           </a:solidFill>
                           <a:latin typeface="Cambria Math" panose="02040503050406030204" pitchFamily="18" charset="0"/>
                           <a:ea typeface="Verdana" panose="020B0604030504040204" pitchFamily="34" charset="0"/>
@@ -12199,9 +12282,9 @@
                       <m:sSub>
                         <m:sSubPr>
                           <m:ctrlPr>
-                            <a:rPr lang="en-US" sz="2800" i="1">
+                            <a:rPr lang="en-US" sz="2800" i="1" smtClean="0">
                               <a:solidFill>
-                                <a:schemeClr val="bg1"/>
+                                <a:srgbClr val="00B0F0"/>
                               </a:solidFill>
                               <a:latin typeface="Cambria Math" panose="02040503050406030204" pitchFamily="18" charset="0"/>
                               <a:ea typeface="Verdana" panose="020B0604030504040204" pitchFamily="34" charset="0"/>
@@ -12212,7 +12295,7 @@
                           <m:r>
                             <a:rPr lang="en-US" sz="2800" i="1">
                               <a:solidFill>
-                                <a:schemeClr val="bg1"/>
+                                <a:srgbClr val="00B0F0"/>
                               </a:solidFill>
                               <a:latin typeface="Cambria Math" panose="02040503050406030204" pitchFamily="18" charset="0"/>
                               <a:ea typeface="Verdana" panose="020B0604030504040204" pitchFamily="34" charset="0"/>
@@ -12224,7 +12307,7 @@
                           <m:r>
                             <a:rPr lang="en-US" sz="2800" b="0" i="1" smtClean="0">
                               <a:solidFill>
-                                <a:schemeClr val="bg1"/>
+                                <a:srgbClr val="00B0F0"/>
                               </a:solidFill>
                               <a:latin typeface="Cambria Math" panose="02040503050406030204" pitchFamily="18" charset="0"/>
                               <a:ea typeface="Verdana" panose="020B0604030504040204" pitchFamily="34" charset="0"/>
@@ -12246,7 +12329,7 @@
                       <m:r>
                         <a:rPr lang="en-US" sz="2800" b="0" i="1" baseline="30000" smtClean="0">
                           <a:solidFill>
-                            <a:schemeClr val="bg1"/>
+                            <a:srgbClr val="FF0000"/>
                           </a:solidFill>
                           <a:latin typeface="Cambria Math" panose="02040503050406030204" pitchFamily="18" charset="0"/>
                           <a:ea typeface="Verdana" panose="020B0604030504040204" pitchFamily="34" charset="0"/>
@@ -12288,7 +12371,7 @@
             </p:nvSpPr>
             <p:spPr>
               <a:xfrm>
-                <a:off x="1199456" y="3573016"/>
+                <a:off x="551384" y="6237312"/>
                 <a:ext cx="5788123" cy="523220"/>
               </a:xfrm>
               <a:prstGeom prst="rect">
@@ -12332,8 +12415,8 @@
             </p:nvSpPr>
             <p:spPr>
               <a:xfrm>
-                <a:off x="2207568" y="4797152"/>
-                <a:ext cx="6125651" cy="987643"/>
+                <a:off x="5303912" y="4581128"/>
+                <a:ext cx="5511765" cy="987643"/>
               </a:xfrm>
               <a:prstGeom prst="rect">
                 <a:avLst/>
@@ -12355,9 +12438,9 @@
                       <m:sSub>
                         <m:sSubPr>
                           <m:ctrlPr>
-                            <a:rPr lang="en-US" sz="2800" i="1">
+                            <a:rPr lang="en-US" sz="2800" i="1" smtClean="0">
                               <a:solidFill>
-                                <a:schemeClr val="bg1"/>
+                                <a:srgbClr val="FF0000"/>
                               </a:solidFill>
                               <a:latin typeface="Cambria Math" panose="02040503050406030204" pitchFamily="18" charset="0"/>
                               <a:ea typeface="Verdana" panose="020B0604030504040204" pitchFamily="34" charset="0"/>
@@ -12366,9 +12449,9 @@
                         </m:sSubPr>
                         <m:e>
                           <m:r>
-                            <a:rPr lang="en-US" sz="2800" i="1">
+                            <a:rPr lang="en-US" sz="2800" b="0" i="1">
                               <a:solidFill>
-                                <a:schemeClr val="bg1"/>
+                                <a:srgbClr val="FF0000"/>
                               </a:solidFill>
                               <a:latin typeface="Cambria Math" panose="02040503050406030204" pitchFamily="18" charset="0"/>
                               <a:ea typeface="Verdana" panose="020B0604030504040204" pitchFamily="34" charset="0"/>
@@ -12378,14 +12461,14 @@
                         </m:e>
                         <m:sub>
                           <m:r>
-                            <a:rPr lang="en-US" sz="2800" b="1" i="1">
+                            <a:rPr lang="en-US" sz="2800" b="0" i="1">
                               <a:solidFill>
-                                <a:schemeClr val="bg1"/>
+                                <a:srgbClr val="FF0000"/>
                               </a:solidFill>
                               <a:latin typeface="Cambria Math" panose="02040503050406030204" pitchFamily="18" charset="0"/>
                               <a:ea typeface="Verdana" panose="020B0604030504040204" pitchFamily="34" charset="0"/>
                             </a:rPr>
-                            <m:t>𝑹𝒊𝒅𝒈𝒆</m:t>
+                            <m:t>𝑅𝑖𝑑𝑔𝑒</m:t>
                           </m:r>
                         </m:sub>
                       </m:sSub>
@@ -12413,9 +12496,9 @@
                         </m:sSubPr>
                         <m:e>
                           <m:r>
-                            <a:rPr lang="en-US" sz="2800" i="1">
+                            <a:rPr lang="en-US" sz="2800" i="1" smtClean="0">
                               <a:solidFill>
-                                <a:schemeClr val="bg1"/>
+                                <a:srgbClr val="FF0000"/>
                               </a:solidFill>
                               <a:latin typeface="Cambria Math" panose="02040503050406030204" pitchFamily="18" charset="0"/>
                               <a:ea typeface="Verdana" panose="020B0604030504040204" pitchFamily="34" charset="0"/>
@@ -12423,18 +12506,7 @@
                             <m:t>𝐸</m:t>
                           </m:r>
                         </m:e>
-                        <m:sub>
-                          <m:r>
-                            <a:rPr lang="en-US" sz="2800" i="1">
-                              <a:solidFill>
-                                <a:schemeClr val="bg1"/>
-                              </a:solidFill>
-                              <a:latin typeface="Cambria Math" panose="02040503050406030204" pitchFamily="18" charset="0"/>
-                              <a:ea typeface="Verdana" panose="020B0604030504040204" pitchFamily="34" charset="0"/>
-                            </a:rPr>
-                            <m:t>𝐿𝑜𝑔𝑅𝑒𝑔</m:t>
-                          </m:r>
-                        </m:sub>
+                        <m:sub/>
                       </m:sSub>
                       <m:r>
                         <a:rPr lang="en-US" sz="2800" i="1">
@@ -12447,9 +12519,9 @@
                         <m:t>+</m:t>
                       </m:r>
                       <m:r>
-                        <a:rPr lang="el-GR" sz="2800" b="1" i="1">
+                        <a:rPr lang="el-GR" sz="2800" b="1" i="1" smtClean="0">
                           <a:solidFill>
-                            <a:schemeClr val="bg1"/>
+                            <a:srgbClr val="FF0000"/>
                           </a:solidFill>
                           <a:latin typeface="Cambria Math" panose="02040503050406030204" pitchFamily="18" charset="0"/>
                           <a:ea typeface="Verdana" panose="020B0604030504040204" pitchFamily="34" charset="0"/>
@@ -12492,7 +12564,17 @@
                               <a:latin typeface="Cambria Math" panose="02040503050406030204" pitchFamily="18" charset="0"/>
                               <a:ea typeface="Verdana" panose="020B0604030504040204" pitchFamily="34" charset="0"/>
                             </a:rPr>
-                            <m:t>=1</m:t>
+                            <m:t>=</m:t>
+                          </m:r>
+                          <m:r>
+                            <a:rPr lang="en-US" sz="2800" i="1">
+                              <a:solidFill>
+                                <a:schemeClr val="bg1"/>
+                              </a:solidFill>
+                              <a:latin typeface="Cambria Math" panose="02040503050406030204" pitchFamily="18" charset="0"/>
+                              <a:ea typeface="Verdana" panose="020B0604030504040204" pitchFamily="34" charset="0"/>
+                            </a:rPr>
+                            <m:t>1</m:t>
                           </m:r>
                         </m:sub>
                         <m:sup>
@@ -12522,9 +12604,9 @@
                             </m:sSubSupPr>
                             <m:e>
                               <m:r>
-                                <a:rPr lang="en-US" sz="2800" i="1">
+                                <a:rPr lang="en-US" sz="2800" i="1" smtClean="0">
                                   <a:solidFill>
-                                    <a:schemeClr val="bg1"/>
+                                    <a:srgbClr val="00B0F0"/>
                                   </a:solidFill>
                                   <a:latin typeface="Cambria Math" panose="02040503050406030204" pitchFamily="18" charset="0"/>
                                   <a:ea typeface="Verdana" panose="020B0604030504040204" pitchFamily="34" charset="0"/>
@@ -12534,9 +12616,9 @@
                             </m:e>
                             <m:sub>
                               <m:r>
-                                <a:rPr lang="en-US" sz="2800" i="1">
+                                <a:rPr lang="en-US" sz="2800" i="1" smtClean="0">
                                   <a:solidFill>
-                                    <a:schemeClr val="bg1"/>
+                                    <a:srgbClr val="00B0F0"/>
                                   </a:solidFill>
                                   <a:latin typeface="Cambria Math" panose="02040503050406030204" pitchFamily="18" charset="0"/>
                                   <a:ea typeface="Verdana" panose="020B0604030504040204" pitchFamily="34" charset="0"/>
@@ -12606,8 +12688,8 @@
             </p:nvSpPr>
             <p:spPr>
               <a:xfrm>
-                <a:off x="2207568" y="4797152"/>
-                <a:ext cx="6125651" cy="987643"/>
+                <a:off x="5303912" y="4581128"/>
+                <a:ext cx="5511765" cy="987643"/>
               </a:xfrm>
               <a:prstGeom prst="rect">
                 <a:avLst/>
@@ -12650,8 +12732,8 @@
             </p:nvSpPr>
             <p:spPr>
               <a:xfrm>
-                <a:off x="3333038" y="5505743"/>
-                <a:ext cx="6181757" cy="987643"/>
+                <a:off x="5375920" y="5517232"/>
+                <a:ext cx="5582234" cy="987643"/>
               </a:xfrm>
               <a:prstGeom prst="rect">
                 <a:avLst/>
@@ -12673,9 +12755,9 @@
                       <m:sSub>
                         <m:sSubPr>
                           <m:ctrlPr>
-                            <a:rPr lang="en-US" sz="2800" i="1">
+                            <a:rPr lang="en-US" sz="2800" i="1" smtClean="0">
                               <a:solidFill>
-                                <a:schemeClr val="bg1"/>
+                                <a:srgbClr val="FF0000"/>
                               </a:solidFill>
                               <a:latin typeface="Cambria Math" panose="02040503050406030204" pitchFamily="18" charset="0"/>
                               <a:ea typeface="Verdana" panose="020B0604030504040204" pitchFamily="34" charset="0"/>
@@ -12686,7 +12768,7 @@
                           <m:r>
                             <a:rPr lang="en-US" sz="2800" i="1">
                               <a:solidFill>
-                                <a:schemeClr val="bg1"/>
+                                <a:srgbClr val="FF0000"/>
                               </a:solidFill>
                               <a:latin typeface="Cambria Math" panose="02040503050406030204" pitchFamily="18" charset="0"/>
                               <a:ea typeface="Verdana" panose="020B0604030504040204" pitchFamily="34" charset="0"/>
@@ -12696,14 +12778,14 @@
                         </m:e>
                         <m:sub>
                           <m:r>
-                            <a:rPr lang="en-US" sz="2800" b="1" i="1">
+                            <a:rPr lang="en-US" sz="2800" i="1">
                               <a:solidFill>
-                                <a:schemeClr val="bg1"/>
+                                <a:srgbClr val="FF0000"/>
                               </a:solidFill>
                               <a:latin typeface="Cambria Math" panose="02040503050406030204" pitchFamily="18" charset="0"/>
                               <a:ea typeface="Verdana" panose="020B0604030504040204" pitchFamily="34" charset="0"/>
                             </a:rPr>
-                            <m:t>𝑳𝒂𝒔𝒔𝒐</m:t>
+                            <m:t>𝐿𝑎𝑠𝑠𝑜</m:t>
                           </m:r>
                         </m:sub>
                       </m:sSub>
@@ -12731,9 +12813,9 @@
                         </m:sSubPr>
                         <m:e>
                           <m:r>
-                            <a:rPr lang="en-US" sz="2800" i="1">
+                            <a:rPr lang="en-US" sz="2800" i="1" smtClean="0">
                               <a:solidFill>
-                                <a:schemeClr val="bg1"/>
+                                <a:srgbClr val="FF0000"/>
                               </a:solidFill>
                               <a:latin typeface="Cambria Math" panose="02040503050406030204" pitchFamily="18" charset="0"/>
                               <a:ea typeface="Verdana" panose="020B0604030504040204" pitchFamily="34" charset="0"/>
@@ -12741,18 +12823,7 @@
                             <m:t>𝐸</m:t>
                           </m:r>
                         </m:e>
-                        <m:sub>
-                          <m:r>
-                            <a:rPr lang="en-US" sz="2800" i="1">
-                              <a:solidFill>
-                                <a:schemeClr val="bg1"/>
-                              </a:solidFill>
-                              <a:latin typeface="Cambria Math" panose="02040503050406030204" pitchFamily="18" charset="0"/>
-                              <a:ea typeface="Verdana" panose="020B0604030504040204" pitchFamily="34" charset="0"/>
-                            </a:rPr>
-                            <m:t>𝐿𝑜𝑔𝑅𝑒𝑔</m:t>
-                          </m:r>
-                        </m:sub>
+                        <m:sub/>
                       </m:sSub>
                       <m:r>
                         <a:rPr lang="en-US" sz="2800" i="1">
@@ -12765,9 +12836,9 @@
                         <m:t>+</m:t>
                       </m:r>
                       <m:r>
-                        <a:rPr lang="el-GR" sz="2800" b="1" i="1">
+                        <a:rPr lang="el-GR" sz="2800" b="1" i="1" smtClean="0">
                           <a:solidFill>
-                            <a:schemeClr val="bg1"/>
+                            <a:srgbClr val="FF0000"/>
                           </a:solidFill>
                           <a:latin typeface="Cambria Math" panose="02040503050406030204" pitchFamily="18" charset="0"/>
                           <a:ea typeface="Verdana" panose="020B0604030504040204" pitchFamily="34" charset="0"/>
@@ -12810,7 +12881,17 @@
                               <a:latin typeface="Cambria Math" panose="02040503050406030204" pitchFamily="18" charset="0"/>
                               <a:ea typeface="Verdana" panose="020B0604030504040204" pitchFamily="34" charset="0"/>
                             </a:rPr>
-                            <m:t>=1</m:t>
+                            <m:t>=</m:t>
+                          </m:r>
+                          <m:r>
+                            <a:rPr lang="en-US" sz="2800" i="1">
+                              <a:solidFill>
+                                <a:schemeClr val="bg1"/>
+                              </a:solidFill>
+                              <a:latin typeface="Cambria Math" panose="02040503050406030204" pitchFamily="18" charset="0"/>
+                              <a:ea typeface="Verdana" panose="020B0604030504040204" pitchFamily="34" charset="0"/>
+                            </a:rPr>
+                            <m:t>1</m:t>
                           </m:r>
                         </m:sub>
                         <m:sup>
@@ -12839,9 +12920,9 @@
                           <m:sSub>
                             <m:sSubPr>
                               <m:ctrlPr>
-                                <a:rPr lang="en-US" sz="2800" i="1">
+                                <a:rPr lang="en-US" sz="2800" i="1" smtClean="0">
                                   <a:solidFill>
-                                    <a:schemeClr val="bg1"/>
+                                    <a:srgbClr val="00B0F0"/>
                                   </a:solidFill>
                                   <a:latin typeface="Cambria Math" panose="02040503050406030204" pitchFamily="18" charset="0"/>
                                   <a:ea typeface="Verdana" panose="020B0604030504040204" pitchFamily="34" charset="0"/>
@@ -12852,7 +12933,7 @@
                               <m:r>
                                 <a:rPr lang="en-US" sz="2800" i="1">
                                   <a:solidFill>
-                                    <a:schemeClr val="bg1"/>
+                                    <a:srgbClr val="00B0F0"/>
                                   </a:solidFill>
                                   <a:latin typeface="Cambria Math" panose="02040503050406030204" pitchFamily="18" charset="0"/>
                                   <a:ea typeface="Verdana" panose="020B0604030504040204" pitchFamily="34" charset="0"/>
@@ -12864,7 +12945,7 @@
                               <m:r>
                                 <a:rPr lang="en-US" sz="2800" i="1">
                                   <a:solidFill>
-                                    <a:schemeClr val="bg1"/>
+                                    <a:srgbClr val="00B0F0"/>
                                   </a:solidFill>
                                   <a:latin typeface="Cambria Math" panose="02040503050406030204" pitchFamily="18" charset="0"/>
                                   <a:ea typeface="Verdana" panose="020B0604030504040204" pitchFamily="34" charset="0"/>
@@ -12932,8 +13013,8 @@
             </p:nvSpPr>
             <p:spPr>
               <a:xfrm>
-                <a:off x="3333038" y="5505743"/>
-                <a:ext cx="6181757" cy="987643"/>
+                <a:off x="5375920" y="5517232"/>
+                <a:ext cx="5582234" cy="987643"/>
               </a:xfrm>
               <a:prstGeom prst="rect">
                 <a:avLst/>
@@ -12964,7 +13045,7 @@
         <mc:Choice Requires="a14">
           <p:sp>
             <p:nvSpPr>
-              <p:cNvPr id="18" name="Прямоугольник 17">
+              <p:cNvPr id="24" name="Прямоугольник 23">
                 <a:extLst>
                   <a:ext uri="{FF2B5EF4-FFF2-40B4-BE49-F238E27FC236}">
                     <a16:creationId xmlns:a16="http://schemas.microsoft.com/office/drawing/2014/main" id="{9E106E79-501E-4970-ABD6-85433EED4D27}"/>
@@ -12976,7 +13057,7 @@
             </p:nvSpPr>
             <p:spPr>
               <a:xfrm>
-                <a:off x="2207568" y="4005064"/>
+                <a:off x="6384032" y="3573016"/>
                 <a:ext cx="2746052" cy="1033168"/>
               </a:xfrm>
               <a:prstGeom prst="rect">
@@ -13001,7 +13082,7 @@
                           <m:ctrlPr>
                             <a:rPr lang="en-US" sz="2800" i="1" smtClean="0">
                               <a:solidFill>
-                                <a:schemeClr val="bg1"/>
+                                <a:srgbClr val="00B0F0"/>
                               </a:solidFill>
                               <a:latin typeface="Cambria Math" panose="02040503050406030204" pitchFamily="18" charset="0"/>
                               <a:ea typeface="Verdana" panose="020B0604030504040204" pitchFamily="34" charset="0"/>
@@ -13012,7 +13093,7 @@
                           <m:r>
                             <a:rPr lang="en-US" sz="2800" i="1">
                               <a:solidFill>
-                                <a:schemeClr val="bg1"/>
+                                <a:srgbClr val="00B0F0"/>
                               </a:solidFill>
                               <a:latin typeface="Cambria Math" panose="02040503050406030204" pitchFamily="18" charset="0"/>
                               <a:ea typeface="Verdana" panose="020B0604030504040204" pitchFamily="34" charset="0"/>
@@ -13024,7 +13105,7 @@
                           <m:r>
                             <a:rPr lang="en-US" sz="2800" b="0" i="1" smtClean="0">
                               <a:solidFill>
-                                <a:schemeClr val="bg1"/>
+                                <a:srgbClr val="00B0F0"/>
                               </a:solidFill>
                               <a:latin typeface="Cambria Math" panose="02040503050406030204" pitchFamily="18" charset="0"/>
                               <a:ea typeface="Verdana" panose="020B0604030504040204" pitchFamily="34" charset="0"/>
@@ -13046,9 +13127,9 @@
                       <m:sSub>
                         <m:sSubPr>
                           <m:ctrlPr>
-                            <a:rPr lang="en-US" sz="2800" i="1">
+                            <a:rPr lang="en-US" sz="2800" i="1" smtClean="0">
                               <a:solidFill>
-                                <a:schemeClr val="bg1"/>
+                                <a:srgbClr val="00B0F0"/>
                               </a:solidFill>
                               <a:latin typeface="Cambria Math" panose="02040503050406030204" pitchFamily="18" charset="0"/>
                               <a:ea typeface="Verdana" panose="020B0604030504040204" pitchFamily="34" charset="0"/>
@@ -13059,7 +13140,7 @@
                           <m:r>
                             <a:rPr lang="en-US" sz="2800" i="1">
                               <a:solidFill>
-                                <a:schemeClr val="bg1"/>
+                                <a:srgbClr val="00B0F0"/>
                               </a:solidFill>
                               <a:latin typeface="Cambria Math" panose="02040503050406030204" pitchFamily="18" charset="0"/>
                               <a:ea typeface="Verdana" panose="020B0604030504040204" pitchFamily="34" charset="0"/>
@@ -13071,7 +13152,7 @@
                           <m:r>
                             <a:rPr lang="en-US" sz="2800" b="0" i="1" smtClean="0">
                               <a:solidFill>
-                                <a:schemeClr val="bg1"/>
+                                <a:srgbClr val="00B0F0"/>
                               </a:solidFill>
                               <a:latin typeface="Cambria Math" panose="02040503050406030204" pitchFamily="18" charset="0"/>
                               <a:ea typeface="Verdana" panose="020B0604030504040204" pitchFamily="34" charset="0"/>
@@ -13091,13 +13172,16 @@
                         <m:t>−</m:t>
                       </m:r>
                       <m:r>
-                        <a:rPr lang="el-GR" sz="2800" b="1" i="1">
+                        <m:rPr>
+                          <m:sty m:val="p"/>
+                        </m:rPr>
+                        <a:rPr lang="el-GR" sz="2800" b="1" i="1" smtClean="0">
                           <a:solidFill>
-                            <a:schemeClr val="bg1"/>
+                            <a:srgbClr val="FF0000"/>
                           </a:solidFill>
                           <a:latin typeface="Cambria Math" panose="02040503050406030204" pitchFamily="18" charset="0"/>
                         </a:rPr>
-                        <m:t>𝜼</m:t>
+                        <m:t>η</m:t>
                       </m:r>
                       <m:r>
                         <a:rPr lang="en-US" sz="2800" b="0" i="0" smtClean="0">
@@ -13112,9 +13196,9 @@
                       <m:f>
                         <m:fPr>
                           <m:ctrlPr>
-                            <a:rPr lang="en-US" sz="2800" i="1">
+                            <a:rPr lang="en-US" sz="2800" i="1" smtClean="0">
                               <a:solidFill>
-                                <a:schemeClr val="bg1"/>
+                                <a:srgbClr val="FF0000"/>
                               </a:solidFill>
                               <a:latin typeface="Cambria Math" panose="02040503050406030204" pitchFamily="18" charset="0"/>
                             </a:rPr>
@@ -13124,7 +13208,7 @@
                           <m:r>
                             <a:rPr lang="en-US" sz="2800" i="1">
                               <a:solidFill>
-                                <a:schemeClr val="bg1"/>
+                                <a:srgbClr val="FF0000"/>
                               </a:solidFill>
                               <a:latin typeface="Cambria Math" panose="02040503050406030204" pitchFamily="18" charset="0"/>
                             </a:rPr>
@@ -13133,7 +13217,7 @@
                           <m:r>
                             <a:rPr lang="en-US" sz="2800" i="1">
                               <a:solidFill>
-                                <a:schemeClr val="bg1"/>
+                                <a:srgbClr val="FF0000"/>
                               </a:solidFill>
                               <a:latin typeface="Cambria Math" panose="02040503050406030204" pitchFamily="18" charset="0"/>
                             </a:rPr>
@@ -13144,7 +13228,7 @@
                           <m:r>
                             <a:rPr lang="en-US" sz="2800" i="1">
                               <a:solidFill>
-                                <a:schemeClr val="bg1"/>
+                                <a:srgbClr val="FF0000"/>
                               </a:solidFill>
                               <a:latin typeface="Cambria Math" panose="02040503050406030204" pitchFamily="18" charset="0"/>
                             </a:rPr>
@@ -13155,7 +13239,7 @@
                               <m:ctrlPr>
                                 <a:rPr lang="en-US" sz="2800" b="0" i="1" smtClean="0">
                                   <a:solidFill>
-                                    <a:schemeClr val="bg1"/>
+                                    <a:srgbClr val="FF0000"/>
                                   </a:solidFill>
                                   <a:latin typeface="Cambria Math" panose="02040503050406030204" pitchFamily="18" charset="0"/>
                                 </a:rPr>
@@ -13165,7 +13249,7 @@
                               <m:r>
                                 <a:rPr lang="en-US" sz="2800" i="1">
                                   <a:solidFill>
-                                    <a:schemeClr val="bg1"/>
+                                    <a:srgbClr val="FF0000"/>
                                   </a:solidFill>
                                   <a:latin typeface="Cambria Math" panose="02040503050406030204" pitchFamily="18" charset="0"/>
                                 </a:rPr>
@@ -13176,7 +13260,7 @@
                               <m:r>
                                 <a:rPr lang="en-US" sz="2800" b="0" i="1" smtClean="0">
                                   <a:solidFill>
-                                    <a:schemeClr val="bg1"/>
+                                    <a:srgbClr val="FF0000"/>
                                   </a:solidFill>
                                   <a:latin typeface="Cambria Math" panose="02040503050406030204" pitchFamily="18" charset="0"/>
                                 </a:rPr>
@@ -13197,7 +13281,7 @@
         <mc:Fallback xmlns="">
           <p:sp>
             <p:nvSpPr>
-              <p:cNvPr id="18" name="Прямоугольник 17">
+              <p:cNvPr id="24" name="Прямоугольник 23">
                 <a:extLst>
                   <a:ext uri="{FF2B5EF4-FFF2-40B4-BE49-F238E27FC236}">
                     <a16:creationId xmlns:a16="http://schemas.microsoft.com/office/drawing/2014/main" id="{9E106E79-501E-4970-ABD6-85433EED4D27}"/>
@@ -13211,7 +13295,7 @@
             </p:nvSpPr>
             <p:spPr>
               <a:xfrm>
-                <a:off x="2207568" y="4005064"/>
+                <a:off x="6384032" y="3573016"/>
                 <a:ext cx="2746052" cy="1033168"/>
               </a:xfrm>
               <a:prstGeom prst="rect">
@@ -13239,10 +13323,456 @@
           </p:sp>
         </mc:Fallback>
       </mc:AlternateContent>
+      <mc:AlternateContent xmlns:mc="http://schemas.openxmlformats.org/markup-compatibility/2006" xmlns:a14="http://schemas.microsoft.com/office/drawing/2010/main">
+        <mc:Choice Requires="a14">
+          <p:sp>
+            <p:nvSpPr>
+              <p:cNvPr id="25" name="Прямоугольник 24">
+                <a:extLst>
+                  <a:ext uri="{FF2B5EF4-FFF2-40B4-BE49-F238E27FC236}">
+                    <a16:creationId xmlns:a16="http://schemas.microsoft.com/office/drawing/2014/main" id="{5BAC8E17-8677-4BB8-AA70-59756085E31C}"/>
+                  </a:ext>
+                </a:extLst>
+              </p:cNvPr>
+              <p:cNvSpPr/>
+              <p:nvPr/>
+            </p:nvSpPr>
+            <p:spPr>
+              <a:xfrm>
+                <a:off x="1271464" y="3789040"/>
+                <a:ext cx="4283416" cy="833883"/>
+              </a:xfrm>
+              <a:prstGeom prst="rect">
+                <a:avLst/>
+              </a:prstGeom>
+            </p:spPr>
+            <p:txBody>
+              <a:bodyPr wrap="none">
+                <a:spAutoFit/>
+              </a:bodyPr>
+              <a:lstStyle/>
+              <a:p>
+                <a:pPr/>
+                <a14:m>
+                  <m:oMathPara xmlns:m="http://schemas.openxmlformats.org/officeDocument/2006/math">
+                    <m:oMathParaPr>
+                      <m:jc m:val="centerGroup"/>
+                    </m:oMathParaPr>
+                    <m:oMath xmlns:m="http://schemas.openxmlformats.org/officeDocument/2006/math">
+                      <m:r>
+                        <a:rPr lang="en-US" sz="2400" b="0" i="1" smtClean="0">
+                          <a:solidFill>
+                            <a:srgbClr val="FF0000"/>
+                          </a:solidFill>
+                          <a:latin typeface="Cambria Math" panose="02040503050406030204" pitchFamily="18" charset="0"/>
+                          <a:ea typeface="Verdana" panose="020B0604030504040204" pitchFamily="34" charset="0"/>
+                        </a:rPr>
+                        <m:t>𝐸</m:t>
+                      </m:r>
+                      <m:r>
+                        <a:rPr lang="en-US" sz="2400" b="0" i="1" smtClean="0">
+                          <a:solidFill>
+                            <a:schemeClr val="bg1"/>
+                          </a:solidFill>
+                          <a:latin typeface="Cambria Math" panose="02040503050406030204" pitchFamily="18" charset="0"/>
+                          <a:ea typeface="Verdana" panose="020B0604030504040204" pitchFamily="34" charset="0"/>
+                        </a:rPr>
+                        <m:t>=</m:t>
+                      </m:r>
+                      <m:f>
+                        <m:fPr>
+                          <m:ctrlPr>
+                            <a:rPr lang="en-US" sz="2400" b="0" i="1" smtClean="0">
+                              <a:solidFill>
+                                <a:schemeClr val="bg1"/>
+                              </a:solidFill>
+                              <a:latin typeface="Cambria Math" panose="02040503050406030204" pitchFamily="18" charset="0"/>
+                              <a:ea typeface="Verdana" panose="020B0604030504040204" pitchFamily="34" charset="0"/>
+                            </a:rPr>
+                          </m:ctrlPr>
+                        </m:fPr>
+                        <m:num>
+                          <m:r>
+                            <a:rPr lang="en-US" sz="2400" b="0" i="1" smtClean="0">
+                              <a:solidFill>
+                                <a:schemeClr val="bg1"/>
+                              </a:solidFill>
+                              <a:latin typeface="Cambria Math" panose="02040503050406030204" pitchFamily="18" charset="0"/>
+                              <a:ea typeface="Verdana" panose="020B0604030504040204" pitchFamily="34" charset="0"/>
+                            </a:rPr>
+                            <m:t>1</m:t>
+                          </m:r>
+                        </m:num>
+                        <m:den>
+                          <m:r>
+                            <a:rPr lang="en-US" sz="2400" b="0" i="1" smtClean="0">
+                              <a:solidFill>
+                                <a:schemeClr val="bg1"/>
+                              </a:solidFill>
+                              <a:latin typeface="Cambria Math" panose="02040503050406030204" pitchFamily="18" charset="0"/>
+                              <a:ea typeface="Verdana" panose="020B0604030504040204" pitchFamily="34" charset="0"/>
+                            </a:rPr>
+                            <m:t>2</m:t>
+                          </m:r>
+                          <m:r>
+                            <a:rPr lang="en-US" sz="2400" b="0" i="1" smtClean="0">
+                              <a:solidFill>
+                                <a:schemeClr val="bg1"/>
+                              </a:solidFill>
+                              <a:latin typeface="Cambria Math" panose="02040503050406030204" pitchFamily="18" charset="0"/>
+                              <a:ea typeface="Verdana" panose="020B0604030504040204" pitchFamily="34" charset="0"/>
+                            </a:rPr>
+                            <m:t>𝑛</m:t>
+                          </m:r>
+                        </m:den>
+                      </m:f>
+                      <m:nary>
+                        <m:naryPr>
+                          <m:chr m:val="∑"/>
+                          <m:limLoc m:val="subSup"/>
+                          <m:ctrlPr>
+                            <a:rPr lang="en-US" sz="2400" b="0" i="1" smtClean="0">
+                              <a:solidFill>
+                                <a:schemeClr val="bg1"/>
+                              </a:solidFill>
+                              <a:latin typeface="Cambria Math" panose="02040503050406030204" pitchFamily="18" charset="0"/>
+                              <a:ea typeface="Verdana" panose="020B0604030504040204" pitchFamily="34" charset="0"/>
+                            </a:rPr>
+                          </m:ctrlPr>
+                        </m:naryPr>
+                        <m:sub>
+                          <m:r>
+                            <m:rPr>
+                              <m:brk m:alnAt="25"/>
+                            </m:rPr>
+                            <a:rPr lang="en-US" sz="2400" b="0" i="1" smtClean="0">
+                              <a:solidFill>
+                                <a:schemeClr val="bg1"/>
+                              </a:solidFill>
+                              <a:latin typeface="Cambria Math" panose="02040503050406030204" pitchFamily="18" charset="0"/>
+                              <a:ea typeface="Verdana" panose="020B0604030504040204" pitchFamily="34" charset="0"/>
+                            </a:rPr>
+                            <m:t>𝑖</m:t>
+                          </m:r>
+                          <m:r>
+                            <a:rPr lang="en-US" sz="2400" b="0" i="1" smtClean="0">
+                              <a:solidFill>
+                                <a:schemeClr val="bg1"/>
+                              </a:solidFill>
+                              <a:latin typeface="Cambria Math" panose="02040503050406030204" pitchFamily="18" charset="0"/>
+                              <a:ea typeface="Verdana" panose="020B0604030504040204" pitchFamily="34" charset="0"/>
+                            </a:rPr>
+                            <m:t>=</m:t>
+                          </m:r>
+                          <m:r>
+                            <a:rPr lang="en-US" sz="2400" b="0" i="1" smtClean="0">
+                              <a:solidFill>
+                                <a:schemeClr val="bg1"/>
+                              </a:solidFill>
+                              <a:latin typeface="Cambria Math" panose="02040503050406030204" pitchFamily="18" charset="0"/>
+                              <a:ea typeface="Verdana" panose="020B0604030504040204" pitchFamily="34" charset="0"/>
+                            </a:rPr>
+                            <m:t>1</m:t>
+                          </m:r>
+                        </m:sub>
+                        <m:sup>
+                          <m:r>
+                            <a:rPr lang="en-US" sz="2400" b="0" i="1" smtClean="0">
+                              <a:solidFill>
+                                <a:schemeClr val="bg1"/>
+                              </a:solidFill>
+                              <a:latin typeface="Cambria Math" panose="02040503050406030204" pitchFamily="18" charset="0"/>
+                              <a:ea typeface="Verdana" panose="020B0604030504040204" pitchFamily="34" charset="0"/>
+                            </a:rPr>
+                            <m:t>𝑛</m:t>
+                          </m:r>
+                        </m:sup>
+                        <m:e>
+                          <m:sSup>
+                            <m:sSupPr>
+                              <m:ctrlPr>
+                                <a:rPr lang="en-US" sz="2400" b="0" i="1" smtClean="0">
+                                  <a:solidFill>
+                                    <a:schemeClr val="bg1"/>
+                                  </a:solidFill>
+                                  <a:latin typeface="Cambria Math" panose="02040503050406030204" pitchFamily="18" charset="0"/>
+                                  <a:ea typeface="Verdana" panose="020B0604030504040204" pitchFamily="34" charset="0"/>
+                                </a:rPr>
+                              </m:ctrlPr>
+                            </m:sSupPr>
+                            <m:e>
+                              <m:sSub>
+                                <m:sSubPr>
+                                  <m:ctrlPr>
+                                    <a:rPr lang="en-US" sz="2400" i="1" smtClean="0">
+                                      <a:solidFill>
+                                        <a:schemeClr val="bg1"/>
+                                      </a:solidFill>
+                                      <a:latin typeface="Cambria Math" panose="02040503050406030204" pitchFamily="18" charset="0"/>
+                                      <a:ea typeface="Verdana" panose="020B0604030504040204" pitchFamily="34" charset="0"/>
+                                    </a:rPr>
+                                  </m:ctrlPr>
+                                </m:sSubPr>
+                                <m:e>
+                                  <m:r>
+                                    <a:rPr lang="en-US" sz="2400" b="0" i="1" smtClean="0">
+                                      <a:solidFill>
+                                        <a:schemeClr val="bg1"/>
+                                      </a:solidFill>
+                                      <a:latin typeface="Cambria Math" panose="02040503050406030204" pitchFamily="18" charset="0"/>
+                                      <a:ea typeface="Verdana" panose="020B0604030504040204" pitchFamily="34" charset="0"/>
+                                    </a:rPr>
+                                    <m:t>{</m:t>
+                                  </m:r>
+                                  <m:acc>
+                                    <m:accPr>
+                                      <m:chr m:val="̂"/>
+                                      <m:ctrlPr>
+                                        <a:rPr lang="en-US" sz="2400" i="1">
+                                          <a:solidFill>
+                                            <a:schemeClr val="bg1"/>
+                                          </a:solidFill>
+                                          <a:latin typeface="Cambria Math" panose="02040503050406030204" pitchFamily="18" charset="0"/>
+                                          <a:ea typeface="Verdana" panose="020B0604030504040204" pitchFamily="34" charset="0"/>
+                                        </a:rPr>
+                                      </m:ctrlPr>
+                                    </m:accPr>
+                                    <m:e>
+                                      <m:sSub>
+                                        <m:sSubPr>
+                                          <m:ctrlPr>
+                                            <a:rPr lang="en-US" sz="2400" b="0" i="1" smtClean="0">
+                                              <a:solidFill>
+                                                <a:schemeClr val="bg1"/>
+                                              </a:solidFill>
+                                              <a:latin typeface="Cambria Math" panose="02040503050406030204" pitchFamily="18" charset="0"/>
+                                              <a:ea typeface="Verdana" panose="020B0604030504040204" pitchFamily="34" charset="0"/>
+                                            </a:rPr>
+                                          </m:ctrlPr>
+                                        </m:sSubPr>
+                                        <m:e>
+                                          <m:r>
+                                            <a:rPr lang="en-US" sz="2400" i="1">
+                                              <a:solidFill>
+                                                <a:schemeClr val="bg1"/>
+                                              </a:solidFill>
+                                              <a:latin typeface="Cambria Math" panose="02040503050406030204" pitchFamily="18" charset="0"/>
+                                              <a:ea typeface="Verdana" panose="020B0604030504040204" pitchFamily="34" charset="0"/>
+                                            </a:rPr>
+                                            <m:t>𝑦</m:t>
+                                          </m:r>
+                                        </m:e>
+                                        <m:sub>
+                                          <m:r>
+                                            <a:rPr lang="en-US" sz="2400" b="0" i="1" smtClean="0">
+                                              <a:solidFill>
+                                                <a:schemeClr val="bg1"/>
+                                              </a:solidFill>
+                                              <a:latin typeface="Cambria Math" panose="02040503050406030204" pitchFamily="18" charset="0"/>
+                                              <a:ea typeface="Verdana" panose="020B0604030504040204" pitchFamily="34" charset="0"/>
+                                            </a:rPr>
+                                            <m:t>𝑖</m:t>
+                                          </m:r>
+                                        </m:sub>
+                                      </m:sSub>
+                                    </m:e>
+                                  </m:acc>
+                                  <m:r>
+                                    <a:rPr lang="en-US" sz="2400" b="0" i="1" smtClean="0">
+                                      <a:solidFill>
+                                        <a:schemeClr val="bg1"/>
+                                      </a:solidFill>
+                                      <a:latin typeface="Cambria Math" panose="02040503050406030204" pitchFamily="18" charset="0"/>
+                                      <a:ea typeface="Verdana" panose="020B0604030504040204" pitchFamily="34" charset="0"/>
+                                    </a:rPr>
+                                    <m:t>−</m:t>
+                                  </m:r>
+                                  <m:r>
+                                    <a:rPr lang="en-US" sz="2400" i="1">
+                                      <a:solidFill>
+                                        <a:schemeClr val="bg1"/>
+                                      </a:solidFill>
+                                      <a:latin typeface="Cambria Math" panose="02040503050406030204" pitchFamily="18" charset="0"/>
+                                      <a:ea typeface="Verdana" panose="020B0604030504040204" pitchFamily="34" charset="0"/>
+                                    </a:rPr>
+                                    <m:t>𝑦</m:t>
+                                  </m:r>
+                                </m:e>
+                                <m:sub>
+                                  <m:r>
+                                    <a:rPr lang="en-US" sz="2400" i="1">
+                                      <a:solidFill>
+                                        <a:schemeClr val="bg1"/>
+                                      </a:solidFill>
+                                      <a:latin typeface="Cambria Math" panose="02040503050406030204" pitchFamily="18" charset="0"/>
+                                      <a:ea typeface="Verdana" panose="020B0604030504040204" pitchFamily="34" charset="0"/>
+                                    </a:rPr>
+                                    <m:t>𝑖</m:t>
+                                  </m:r>
+                                </m:sub>
+                              </m:sSub>
+                              <m:r>
+                                <a:rPr lang="en-US" sz="2400" b="0" i="1" smtClean="0">
+                                  <a:solidFill>
+                                    <a:schemeClr val="bg1"/>
+                                  </a:solidFill>
+                                  <a:latin typeface="Cambria Math" panose="02040503050406030204" pitchFamily="18" charset="0"/>
+                                  <a:ea typeface="Verdana" panose="020B0604030504040204" pitchFamily="34" charset="0"/>
+                                </a:rPr>
+                                <m:t>}</m:t>
+                              </m:r>
+                            </m:e>
+                            <m:sup>
+                              <m:r>
+                                <a:rPr lang="en-US" sz="2400" b="0" i="1" smtClean="0">
+                                  <a:solidFill>
+                                    <a:schemeClr val="bg1"/>
+                                  </a:solidFill>
+                                  <a:latin typeface="Cambria Math" panose="02040503050406030204" pitchFamily="18" charset="0"/>
+                                  <a:ea typeface="Verdana" panose="020B0604030504040204" pitchFamily="34" charset="0"/>
+                                </a:rPr>
+                                <m:t>2</m:t>
+                              </m:r>
+                            </m:sup>
+                          </m:sSup>
+                          <m:r>
+                            <a:rPr lang="en-US" sz="2400" b="0" i="1" smtClean="0">
+                              <a:solidFill>
+                                <a:schemeClr val="bg1"/>
+                              </a:solidFill>
+                              <a:latin typeface="Cambria Math" panose="02040503050406030204" pitchFamily="18" charset="0"/>
+                              <a:ea typeface="Cambria Math" panose="02040503050406030204" pitchFamily="18" charset="0"/>
+                            </a:rPr>
+                            <m:t>→</m:t>
+                          </m:r>
+                          <m:r>
+                            <a:rPr lang="en-US" sz="2400" b="0" i="1" smtClean="0">
+                              <a:solidFill>
+                                <a:schemeClr val="bg1"/>
+                              </a:solidFill>
+                              <a:latin typeface="Cambria Math" panose="02040503050406030204" pitchFamily="18" charset="0"/>
+                              <a:ea typeface="Cambria Math" panose="02040503050406030204" pitchFamily="18" charset="0"/>
+                            </a:rPr>
+                            <m:t>𝑚𝑖𝑛</m:t>
+                          </m:r>
+                        </m:e>
+                      </m:nary>
+                    </m:oMath>
+                  </m:oMathPara>
+                </a14:m>
+                <a:endParaRPr lang="ru-RU" sz="2400" dirty="0"/>
+              </a:p>
+            </p:txBody>
+          </p:sp>
+        </mc:Choice>
+        <mc:Fallback xmlns="">
+          <p:sp>
+            <p:nvSpPr>
+              <p:cNvPr id="25" name="Прямоугольник 24">
+                <a:extLst>
+                  <a:ext uri="{FF2B5EF4-FFF2-40B4-BE49-F238E27FC236}">
+                    <a16:creationId xmlns:a16="http://schemas.microsoft.com/office/drawing/2014/main" id="{5BAC8E17-8677-4BB8-AA70-59756085E31C}"/>
+                  </a:ext>
+                </a:extLst>
+              </p:cNvPr>
+              <p:cNvSpPr>
+                <a:spLocks noRot="1" noChangeAspect="1" noMove="1" noResize="1" noEditPoints="1" noAdjustHandles="1" noChangeArrowheads="1" noChangeShapeType="1" noTextEdit="1"/>
+              </p:cNvSpPr>
+              <p:nvPr/>
+            </p:nvSpPr>
+            <p:spPr>
+              <a:xfrm>
+                <a:off x="1271464" y="3789040"/>
+                <a:ext cx="4283416" cy="833883"/>
+              </a:xfrm>
+              <a:prstGeom prst="rect">
+                <a:avLst/>
+              </a:prstGeom>
+              <a:blipFill>
+                <a:blip r:embed="rId12"/>
+                <a:stretch>
+                  <a:fillRect/>
+                </a:stretch>
+              </a:blipFill>
+            </p:spPr>
+            <p:txBody>
+              <a:bodyPr/>
+              <a:lstStyle/>
+              <a:p>
+                <a:r>
+                  <a:rPr lang="ru-RU">
+                    <a:noFill/>
+                  </a:rPr>
+                  <a:t> </a:t>
+                </a:r>
+              </a:p>
+            </p:txBody>
+          </p:sp>
+        </mc:Fallback>
+      </mc:AlternateContent>
+      <p:sp>
+        <p:nvSpPr>
+          <p:cNvPr id="28" name="Прямоугольник 27">
+            <a:extLst>
+              <a:ext uri="{FF2B5EF4-FFF2-40B4-BE49-F238E27FC236}">
+                <a16:creationId xmlns:a16="http://schemas.microsoft.com/office/drawing/2014/main" id="{9E106E79-501E-4970-ABD6-85433EED4D27}"/>
+              </a:ext>
+            </a:extLst>
+          </p:cNvPr>
+          <p:cNvSpPr/>
+          <p:nvPr/>
+        </p:nvSpPr>
+        <p:spPr>
+          <a:xfrm>
+            <a:off x="695400" y="5157192"/>
+            <a:ext cx="4680520" cy="523220"/>
+          </a:xfrm>
+          <a:prstGeom prst="rect">
+            <a:avLst/>
+          </a:prstGeom>
+        </p:spPr>
+        <p:txBody>
+          <a:bodyPr wrap="square">
+            <a:spAutoFit/>
+          </a:bodyPr>
+          <a:lstStyle/>
+          <a:p>
+            <a:r>
+              <a:rPr lang="en-US" sz="2800" dirty="0" smtClean="0">
+                <a:solidFill>
+                  <a:srgbClr val="FF0000"/>
+                </a:solidFill>
+              </a:rPr>
+              <a:t>penalty</a:t>
+            </a:r>
+            <a:r>
+              <a:rPr lang="ru-RU" sz="2800" dirty="0" smtClean="0">
+                <a:solidFill>
+                  <a:srgbClr val="FF0000"/>
+                </a:solidFill>
+              </a:rPr>
+              <a:t> </a:t>
+            </a:r>
+            <a:r>
+              <a:rPr lang="ru-RU" sz="2800" dirty="0" smtClean="0">
+                <a:solidFill>
+                  <a:schemeClr val="bg1"/>
+                </a:solidFill>
+              </a:rPr>
+              <a:t>(про регуляризацию)</a:t>
+            </a:r>
+            <a:endParaRPr lang="ru-RU" sz="2800" dirty="0">
+              <a:solidFill>
+                <a:srgbClr val="FF0000"/>
+              </a:solidFill>
+            </a:endParaRPr>
+          </a:p>
+        </p:txBody>
+      </p:sp>
     </p:spTree>
     <p:extLst>
       <p:ext uri="{BB962C8B-B14F-4D97-AF65-F5344CB8AC3E}">
-        <p14:creationId xmlns:p14="http://schemas.microsoft.com/office/powerpoint/2010/main" val="213032861"/>
+        <p14:creationId xmlns:p14="http://schemas.microsoft.com/office/powerpoint/2010/main" val="1888484570"/>
       </p:ext>
     </p:extLst>
   </p:cSld>
@@ -13418,7 +13948,7 @@
                                           </p:stCondLst>
                                         </p:cTn>
                                         <p:tgtEl>
-                                          <p:spTgt spid="21"/>
+                                          <p:spTgt spid="25"/>
                                         </p:tgtEl>
                                         <p:attrNameLst>
                                           <p:attrName>style.visibility</p:attrName>
@@ -13463,7 +13993,7 @@
                                           </p:stCondLst>
                                         </p:cTn>
                                         <p:tgtEl>
-                                          <p:spTgt spid="18"/>
+                                          <p:spTgt spid="24"/>
                                         </p:tgtEl>
                                         <p:attrNameLst>
                                           <p:attrName>style.visibility</p:attrName>
@@ -13508,6 +14038,51 @@
                                           </p:stCondLst>
                                         </p:cTn>
                                         <p:tgtEl>
+                                          <p:spTgt spid="28"/>
+                                        </p:tgtEl>
+                                        <p:attrNameLst>
+                                          <p:attrName>style.visibility</p:attrName>
+                                        </p:attrNameLst>
+                                      </p:cBhvr>
+                                      <p:to>
+                                        <p:strVal val="visible"/>
+                                      </p:to>
+                                    </p:set>
+                                  </p:childTnLst>
+                                </p:cTn>
+                              </p:par>
+                            </p:childTnLst>
+                          </p:cTn>
+                        </p:par>
+                      </p:childTnLst>
+                    </p:cTn>
+                  </p:par>
+                  <p:par>
+                    <p:cTn id="27" fill="hold">
+                      <p:stCondLst>
+                        <p:cond delay="indefinite"/>
+                      </p:stCondLst>
+                      <p:childTnLst>
+                        <p:par>
+                          <p:cTn id="28" fill="hold">
+                            <p:stCondLst>
+                              <p:cond delay="0"/>
+                            </p:stCondLst>
+                            <p:childTnLst>
+                              <p:par>
+                                <p:cTn id="29" presetID="1" presetClass="entr" presetSubtype="0" fill="hold" grpId="0" nodeType="clickEffect">
+                                  <p:stCondLst>
+                                    <p:cond delay="0"/>
+                                  </p:stCondLst>
+                                  <p:childTnLst>
+                                    <p:set>
+                                      <p:cBhvr>
+                                        <p:cTn id="30" dur="1" fill="hold">
+                                          <p:stCondLst>
+                                            <p:cond delay="0"/>
+                                          </p:stCondLst>
+                                        </p:cTn>
+                                        <p:tgtEl>
                                           <p:spTgt spid="22"/>
                                         </p:tgtEl>
                                         <p:attrNameLst>
@@ -13522,14 +14097,14 @@
                                 </p:cTn>
                               </p:par>
                               <p:par>
-                                <p:cTn id="27" presetID="1" presetClass="entr" presetSubtype="0" fill="hold" grpId="0" nodeType="withEffect">
+                                <p:cTn id="31" presetID="1" presetClass="entr" presetSubtype="0" fill="hold" grpId="0" nodeType="withEffect">
                                   <p:stCondLst>
                                     <p:cond delay="0"/>
                                   </p:stCondLst>
                                   <p:childTnLst>
                                     <p:set>
                                       <p:cBhvr>
-                                        <p:cTn id="28" dur="1" fill="hold">
+                                        <p:cTn id="32" dur="1" fill="hold">
                                           <p:stCondLst>
                                             <p:cond delay="0"/>
                                           </p:stCondLst>
@@ -13555,26 +14130,71 @@
                     </p:cTn>
                   </p:par>
                   <p:par>
-                    <p:cTn id="29" fill="hold">
+                    <p:cTn id="33" fill="hold">
                       <p:stCondLst>
                         <p:cond delay="indefinite"/>
                       </p:stCondLst>
                       <p:childTnLst>
                         <p:par>
-                          <p:cTn id="30" fill="hold">
+                          <p:cTn id="34" fill="hold">
                             <p:stCondLst>
                               <p:cond delay="0"/>
                             </p:stCondLst>
                             <p:childTnLst>
                               <p:par>
-                                <p:cTn id="31" presetID="1" presetClass="entr" presetSubtype="0" fill="hold" grpId="0" nodeType="clickEffect">
+                                <p:cTn id="35" presetID="1" presetClass="entr" presetSubtype="0" fill="hold" grpId="0" nodeType="clickEffect">
                                   <p:stCondLst>
                                     <p:cond delay="0"/>
                                   </p:stCondLst>
                                   <p:childTnLst>
                                     <p:set>
                                       <p:cBhvr>
-                                        <p:cTn id="32" dur="1" fill="hold">
+                                        <p:cTn id="36" dur="1" fill="hold">
+                                          <p:stCondLst>
+                                            <p:cond delay="0"/>
+                                          </p:stCondLst>
+                                        </p:cTn>
+                                        <p:tgtEl>
+                                          <p:spTgt spid="21"/>
+                                        </p:tgtEl>
+                                        <p:attrNameLst>
+                                          <p:attrName>style.visibility</p:attrName>
+                                        </p:attrNameLst>
+                                      </p:cBhvr>
+                                      <p:to>
+                                        <p:strVal val="visible"/>
+                                      </p:to>
+                                    </p:set>
+                                  </p:childTnLst>
+                                </p:cTn>
+                              </p:par>
+                            </p:childTnLst>
+                          </p:cTn>
+                        </p:par>
+                      </p:childTnLst>
+                    </p:cTn>
+                  </p:par>
+                  <p:par>
+                    <p:cTn id="37" fill="hold">
+                      <p:stCondLst>
+                        <p:cond delay="indefinite"/>
+                      </p:stCondLst>
+                      <p:childTnLst>
+                        <p:par>
+                          <p:cTn id="38" fill="hold">
+                            <p:stCondLst>
+                              <p:cond delay="0"/>
+                            </p:stCondLst>
+                            <p:childTnLst>
+                              <p:par>
+                                <p:cTn id="39" presetID="1" presetClass="entr" presetSubtype="0" fill="hold" grpId="0" nodeType="clickEffect">
+                                  <p:stCondLst>
+                                    <p:cond delay="0"/>
+                                  </p:stCondLst>
+                                  <p:childTnLst>
+                                    <p:set>
+                                      <p:cBhvr>
+                                        <p:cTn id="40" dur="1" fill="hold">
                                           <p:stCondLst>
                                             <p:cond delay="0"/>
                                           </p:stCondLst>
@@ -13628,7 +14248,9 @@
       <p:bldP spid="21" grpId="0"/>
       <p:bldP spid="22" grpId="0"/>
       <p:bldP spid="23" grpId="0"/>
-      <p:bldP spid="18" grpId="0"/>
+      <p:bldP spid="24" grpId="0"/>
+      <p:bldP spid="25" grpId="0"/>
+      <p:bldP spid="28" grpId="0"/>
     </p:bldLst>
   </p:timing>
 </p:sld>
@@ -16660,7 +17282,18 @@
                               <a:ea typeface="Verdana" panose="020B0604030504040204" pitchFamily="34" charset="0"/>
                               <a:cs typeface="Verdana" panose="020B0604030504040204" pitchFamily="34" charset="0"/>
                             </a:rPr>
-                            <m:t>−5</m:t>
+                            <m:t>−</m:t>
+                          </m:r>
+                          <m:r>
+                            <a:rPr lang="en-US" sz="2800" b="0" i="1" dirty="0" smtClean="0">
+                              <a:solidFill>
+                                <a:schemeClr val="bg1"/>
+                              </a:solidFill>
+                              <a:latin typeface="Cambria Math" panose="02040503050406030204" pitchFamily="18" charset="0"/>
+                              <a:ea typeface="Verdana" panose="020B0604030504040204" pitchFamily="34" charset="0"/>
+                              <a:cs typeface="Verdana" panose="020B0604030504040204" pitchFamily="34" charset="0"/>
+                            </a:rPr>
+                            <m:t>5</m:t>
                           </m:r>
                         </m:sup>
                       </m:sSup>
@@ -16797,7 +17430,18 @@
                               <a:ea typeface="Verdana" panose="020B0604030504040204" pitchFamily="34" charset="0"/>
                               <a:cs typeface="Verdana" panose="020B0604030504040204" pitchFamily="34" charset="0"/>
                             </a:rPr>
-                            <m:t>−3</m:t>
+                            <m:t>−</m:t>
+                          </m:r>
+                          <m:r>
+                            <a:rPr lang="en-US" sz="2800" b="0" i="1" dirty="0" smtClean="0">
+                              <a:solidFill>
+                                <a:schemeClr val="bg1"/>
+                              </a:solidFill>
+                              <a:latin typeface="Cambria Math" panose="02040503050406030204" pitchFamily="18" charset="0"/>
+                              <a:ea typeface="Verdana" panose="020B0604030504040204" pitchFamily="34" charset="0"/>
+                              <a:cs typeface="Verdana" panose="020B0604030504040204" pitchFamily="34" charset="0"/>
+                            </a:rPr>
+                            <m:t>3</m:t>
                           </m:r>
                         </m:sup>
                       </m:sSup>
@@ -16934,7 +17578,18 @@
                               <a:ea typeface="Verdana" panose="020B0604030504040204" pitchFamily="34" charset="0"/>
                               <a:cs typeface="Verdana" panose="020B0604030504040204" pitchFamily="34" charset="0"/>
                             </a:rPr>
-                            <m:t>−1</m:t>
+                            <m:t>−</m:t>
+                          </m:r>
+                          <m:r>
+                            <a:rPr lang="en-US" sz="2800" b="0" i="1" dirty="0" smtClean="0">
+                              <a:solidFill>
+                                <a:schemeClr val="bg1"/>
+                              </a:solidFill>
+                              <a:latin typeface="Cambria Math" panose="02040503050406030204" pitchFamily="18" charset="0"/>
+                              <a:ea typeface="Verdana" panose="020B0604030504040204" pitchFamily="34" charset="0"/>
+                              <a:cs typeface="Verdana" panose="020B0604030504040204" pitchFamily="34" charset="0"/>
+                            </a:rPr>
+                            <m:t>1</m:t>
                           </m:r>
                         </m:sup>
                       </m:sSup>
@@ -22286,7 +22941,7 @@
               <a:buChar char="•"/>
             </a:pPr>
             <a:r>
-              <a:rPr lang="ru-RU" sz="2800" dirty="0">
+              <a:rPr lang="ru-RU" sz="2800">
                 <a:solidFill>
                   <a:schemeClr val="bg1"/>
                 </a:solidFill>
@@ -22294,7 +22949,18 @@
                 <a:ea typeface="Verdana" panose="020B0604030504040204" pitchFamily="34" charset="0"/>
                 <a:cs typeface="Verdana" panose="020B0604030504040204" pitchFamily="34" charset="0"/>
               </a:rPr>
-              <a:t>Значимые параметры</a:t>
+              <a:t>Значимые </a:t>
+            </a:r>
+            <a:r>
+              <a:rPr lang="ru-RU" sz="2800" smtClean="0">
+                <a:solidFill>
+                  <a:schemeClr val="bg1"/>
+                </a:solidFill>
+                <a:latin typeface="Verdana" panose="020B0604030504040204" pitchFamily="34" charset="0"/>
+                <a:ea typeface="Verdana" panose="020B0604030504040204" pitchFamily="34" charset="0"/>
+                <a:cs typeface="Verdana" panose="020B0604030504040204" pitchFamily="34" charset="0"/>
+              </a:rPr>
+              <a:t>признаки</a:t>
             </a:r>
             <a:endParaRPr lang="ru-RU" sz="2800" dirty="0"/>
           </a:p>
@@ -24637,8 +25303,8 @@
           </p:sp>
         </mc:Fallback>
       </mc:AlternateContent>
-      <mc:AlternateContent xmlns:mc="http://schemas.openxmlformats.org/markup-compatibility/2006" xmlns:a14="http://schemas.microsoft.com/office/drawing/2010/main">
-        <mc:Choice Requires="a14">
+      <mc:AlternateContent xmlns:mc="http://schemas.openxmlformats.org/markup-compatibility/2006">
+        <mc:Choice xmlns:a14="http://schemas.microsoft.com/office/drawing/2010/main" Requires="a14">
           <p:sp>
             <p:nvSpPr>
               <p:cNvPr id="24" name="Прямоугольник 23">
@@ -24712,9 +25378,9 @@
                       <m:sSub>
                         <m:sSubPr>
                           <m:ctrlPr>
-                            <a:rPr lang="en-US" sz="3600" i="1">
+                            <a:rPr lang="en-US" sz="3600" i="1" smtClean="0">
                               <a:solidFill>
-                                <a:schemeClr val="bg1"/>
+                                <a:srgbClr val="00B0F0"/>
                               </a:solidFill>
                               <a:latin typeface="Cambria Math" panose="02040503050406030204" pitchFamily="18" charset="0"/>
                               <a:ea typeface="Verdana" panose="020B0604030504040204" pitchFamily="34" charset="0"/>
@@ -24725,7 +25391,7 @@
                           <m:r>
                             <a:rPr lang="en-US" sz="3600" i="1">
                               <a:solidFill>
-                                <a:schemeClr val="bg1"/>
+                                <a:srgbClr val="00B0F0"/>
                               </a:solidFill>
                               <a:latin typeface="Cambria Math" panose="02040503050406030204" pitchFamily="18" charset="0"/>
                               <a:ea typeface="Verdana" panose="020B0604030504040204" pitchFamily="34" charset="0"/>
@@ -24737,7 +25403,7 @@
                           <m:r>
                             <a:rPr lang="en-US" sz="3600" i="1">
                               <a:solidFill>
-                                <a:schemeClr val="bg1"/>
+                                <a:srgbClr val="00B0F0"/>
                               </a:solidFill>
                               <a:latin typeface="Cambria Math" panose="02040503050406030204" pitchFamily="18" charset="0"/>
                               <a:ea typeface="Verdana" panose="020B0604030504040204" pitchFamily="34" charset="0"/>
@@ -24792,7 +25458,7 @@
                           <m:r>
                             <a:rPr lang="en-US" sz="3600" b="1" i="1" smtClean="0">
                               <a:solidFill>
-                                <a:schemeClr val="bg1"/>
+                                <a:srgbClr val="00B0F0"/>
                               </a:solidFill>
                               <a:latin typeface="Cambria Math" panose="02040503050406030204" pitchFamily="18" charset="0"/>
                               <a:ea typeface="Verdana" panose="020B0604030504040204" pitchFamily="34" charset="0"/>
@@ -24827,7 +25493,7 @@
             </p:txBody>
           </p:sp>
         </mc:Choice>
-        <mc:Fallback xmlns="">
+        <mc:Fallback>
           <p:sp>
             <p:nvSpPr>
               <p:cNvPr id="24" name="Прямоугольник 23">
@@ -25248,8 +25914,8 @@
           </p:sp>
         </mc:Fallback>
       </mc:AlternateContent>
-      <mc:AlternateContent xmlns:mc="http://schemas.openxmlformats.org/markup-compatibility/2006" xmlns:a14="http://schemas.microsoft.com/office/drawing/2010/main">
-        <mc:Choice Requires="a14">
+      <mc:AlternateContent xmlns:mc="http://schemas.openxmlformats.org/markup-compatibility/2006">
+        <mc:Choice xmlns:a14="http://schemas.microsoft.com/office/drawing/2010/main" Requires="a14">
           <p:sp>
             <p:nvSpPr>
               <p:cNvPr id="30" name="Прямоугольник 29">
@@ -25282,7 +25948,7 @@
                     <m:r>
                       <a:rPr lang="en-US" sz="3200" b="1" i="1" smtClean="0">
                         <a:solidFill>
-                          <a:schemeClr val="bg1"/>
+                          <a:srgbClr val="00B0F0"/>
                         </a:solidFill>
                         <a:latin typeface="Cambria Math" panose="02040503050406030204" pitchFamily="18" charset="0"/>
                         <a:ea typeface="Verdana" panose="020B0604030504040204" pitchFamily="34" charset="0"/>
@@ -25409,7 +26075,7 @@
             </p:txBody>
           </p:sp>
         </mc:Choice>
-        <mc:Fallback xmlns="">
+        <mc:Fallback>
           <p:sp>
             <p:nvSpPr>
               <p:cNvPr id="30" name="Прямоугольник 29">
@@ -25454,8 +26120,8 @@
           </p:sp>
         </mc:Fallback>
       </mc:AlternateContent>
-      <mc:AlternateContent xmlns:mc="http://schemas.openxmlformats.org/markup-compatibility/2006" xmlns:a14="http://schemas.microsoft.com/office/drawing/2010/main">
-        <mc:Choice Requires="a14">
+      <mc:AlternateContent xmlns:mc="http://schemas.openxmlformats.org/markup-compatibility/2006">
+        <mc:Choice xmlns:a14="http://schemas.microsoft.com/office/drawing/2010/main" Requires="a14">
           <p:sp>
             <p:nvSpPr>
               <p:cNvPr id="31" name="Прямоугольник 30">
@@ -25490,7 +26156,7 @@
                         <m:ctrlPr>
                           <a:rPr lang="en-US" sz="3200" i="1" smtClean="0">
                             <a:solidFill>
-                              <a:schemeClr val="bg1"/>
+                              <a:srgbClr val="00B0F0"/>
                             </a:solidFill>
                             <a:latin typeface="Cambria Math" panose="02040503050406030204" pitchFamily="18" charset="0"/>
                             <a:ea typeface="Verdana" panose="020B0604030504040204" pitchFamily="34" charset="0"/>
@@ -25501,7 +26167,7 @@
                         <m:r>
                           <a:rPr lang="en-US" sz="3200" i="1">
                             <a:solidFill>
-                              <a:schemeClr val="bg1"/>
+                              <a:srgbClr val="00B0F0"/>
                             </a:solidFill>
                             <a:latin typeface="Cambria Math" panose="02040503050406030204" pitchFamily="18" charset="0"/>
                             <a:ea typeface="Verdana" panose="020B0604030504040204" pitchFamily="34" charset="0"/>
@@ -25513,7 +26179,7 @@
                         <m:r>
                           <a:rPr lang="en-US" sz="3200" i="1">
                             <a:solidFill>
-                              <a:schemeClr val="bg1"/>
+                              <a:srgbClr val="00B0F0"/>
                             </a:solidFill>
                             <a:latin typeface="Cambria Math" panose="02040503050406030204" pitchFamily="18" charset="0"/>
                             <a:ea typeface="Verdana" panose="020B0604030504040204" pitchFamily="34" charset="0"/>
@@ -25688,7 +26354,7 @@
             </p:txBody>
           </p:sp>
         </mc:Choice>
-        <mc:Fallback xmlns="">
+        <mc:Fallback>
           <p:sp>
             <p:nvSpPr>
               <p:cNvPr id="31" name="Прямоугольник 30">
@@ -25712,7 +26378,7 @@
                 <a:avLst/>
               </a:prstGeom>
               <a:blipFill>
-                <a:blip r:embed="rId10"/>
+                <a:blip r:embed="rId9"/>
                 <a:stretch>
                   <a:fillRect t="-19811" r="-1537" b="-36792"/>
                 </a:stretch>
@@ -27132,7 +27798,7 @@
           </a:lstStyle>
           <a:p>
             <a:r>
-              <a:rPr lang="ru-RU" sz="3200" b="1" dirty="0" smtClean="0">
+              <a:rPr lang="ru-RU" sz="3200" b="1" dirty="0">
                 <a:solidFill>
                   <a:schemeClr val="bg1"/>
                 </a:solidFill>
@@ -27141,13 +27807,6 @@
               </a:rPr>
               <a:t>Регуляризация</a:t>
             </a:r>
-            <a:endParaRPr lang="ru-RU" sz="3200" b="1" dirty="0">
-              <a:solidFill>
-                <a:schemeClr val="bg1"/>
-              </a:solidFill>
-              <a:latin typeface="Verdana" panose="020B0604030504040204" pitchFamily="34" charset="0"/>
-              <a:ea typeface="Verdana" panose="020B0604030504040204" pitchFamily="34" charset="0"/>
-            </a:endParaRPr>
           </a:p>
         </p:txBody>
       </p:sp>
@@ -27681,7 +28340,17 @@
                                               <a:latin typeface="Cambria Math" panose="02040503050406030204" pitchFamily="18" charset="0"/>
                                               <a:ea typeface="Verdana" panose="020B0604030504040204" pitchFamily="34" charset="0"/>
                                             </a:rPr>
-                                            <m:t>=0</m:t>
+                                            <m:t>=</m:t>
+                                          </m:r>
+                                          <m:r>
+                                            <a:rPr lang="en-US" sz="2800" i="1">
+                                              <a:solidFill>
+                                                <a:schemeClr val="bg1"/>
+                                              </a:solidFill>
+                                              <a:latin typeface="Cambria Math" panose="02040503050406030204" pitchFamily="18" charset="0"/>
+                                              <a:ea typeface="Verdana" panose="020B0604030504040204" pitchFamily="34" charset="0"/>
+                                            </a:rPr>
+                                            <m:t>0</m:t>
                                           </m:r>
                                         </m:sub>
                                         <m:sup>
@@ -27700,9 +28369,9 @@
                                           <m:sSub>
                                             <m:sSubPr>
                                               <m:ctrlPr>
-                                                <a:rPr lang="en-US" sz="2800" i="1">
+                                                <a:rPr lang="en-US" sz="2800" i="1" smtClean="0">
                                                   <a:solidFill>
-                                                    <a:schemeClr val="bg1"/>
+                                                    <a:srgbClr val="00B0F0"/>
                                                   </a:solidFill>
                                                   <a:latin typeface="Cambria Math" panose="02040503050406030204" pitchFamily="18" charset="0"/>
                                                   <a:ea typeface="Verdana" panose="020B0604030504040204" pitchFamily="34" charset="0"/>
@@ -27713,7 +28382,7 @@
                                               <m:r>
                                                 <a:rPr lang="en-US" sz="2800" i="1">
                                                   <a:solidFill>
-                                                    <a:schemeClr val="bg1"/>
+                                                    <a:srgbClr val="00B0F0"/>
                                                   </a:solidFill>
                                                   <a:latin typeface="Cambria Math" panose="02040503050406030204" pitchFamily="18" charset="0"/>
                                                   <a:ea typeface="Verdana" panose="020B0604030504040204" pitchFamily="34" charset="0"/>
@@ -27725,7 +28394,7 @@
                                               <m:r>
                                                 <a:rPr lang="en-US" sz="2800" i="1">
                                                   <a:solidFill>
-                                                    <a:schemeClr val="bg1"/>
+                                                    <a:srgbClr val="00B0F0"/>
                                                   </a:solidFill>
                                                   <a:latin typeface="Cambria Math" panose="02040503050406030204" pitchFamily="18" charset="0"/>
                                                   <a:ea typeface="Verdana" panose="020B0604030504040204" pitchFamily="34" charset="0"/>
@@ -28000,9 +28669,9 @@
                         </m:e>
                         <m:sub>
                           <m:r>
-                            <a:rPr lang="en-US" sz="2800" i="1">
+                            <a:rPr lang="en-US" sz="2800" i="1" smtClean="0">
                               <a:solidFill>
-                                <a:schemeClr val="bg1"/>
+                                <a:srgbClr val="FF0000"/>
                               </a:solidFill>
                               <a:latin typeface="Cambria Math" panose="02040503050406030204" pitchFamily="18" charset="0"/>
                               <a:ea typeface="Verdana" panose="020B0604030504040204" pitchFamily="34" charset="0"/>
@@ -28072,9 +28741,9 @@
                         <m:rPr>
                           <m:sty m:val="p"/>
                         </m:rPr>
-                        <a:rPr lang="el-GR" sz="2800" i="1">
+                        <a:rPr lang="el-GR" sz="2800" i="1" smtClean="0">
                           <a:solidFill>
-                            <a:schemeClr val="bg1"/>
+                            <a:srgbClr val="FF0000"/>
                           </a:solidFill>
                           <a:latin typeface="Cambria Math" panose="02040503050406030204" pitchFamily="18" charset="0"/>
                           <a:ea typeface="Verdana" panose="020B0604030504040204" pitchFamily="34" charset="0"/>
@@ -28120,9 +28789,9 @@
                             <m:t>=</m:t>
                           </m:r>
                           <m:r>
-                            <a:rPr lang="ru-RU" sz="2800" i="1">
+                            <a:rPr lang="ru-RU" sz="2800" i="1" smtClean="0">
                               <a:solidFill>
-                                <a:schemeClr val="bg1"/>
+                                <a:srgbClr val="7030A0"/>
                               </a:solidFill>
                               <a:latin typeface="Cambria Math" panose="02040503050406030204" pitchFamily="18" charset="0"/>
                               <a:ea typeface="Verdana" panose="020B0604030504040204" pitchFamily="34" charset="0"/>
@@ -28146,9 +28815,9 @@
                           <m:sSubSup>
                             <m:sSubSupPr>
                               <m:ctrlPr>
-                                <a:rPr lang="en-US" sz="2800" i="1">
+                                <a:rPr lang="en-US" sz="2800" i="1" smtClean="0">
                                   <a:solidFill>
-                                    <a:schemeClr val="bg1"/>
+                                    <a:srgbClr val="00B0F0"/>
                                   </a:solidFill>
                                   <a:latin typeface="Cambria Math" panose="02040503050406030204" pitchFamily="18" charset="0"/>
                                   <a:ea typeface="Verdana" panose="020B0604030504040204" pitchFamily="34" charset="0"/>
@@ -28159,7 +28828,7 @@
                               <m:r>
                                 <a:rPr lang="en-US" sz="2800" i="1">
                                   <a:solidFill>
-                                    <a:schemeClr val="bg1"/>
+                                    <a:srgbClr val="00B0F0"/>
                                   </a:solidFill>
                                   <a:latin typeface="Cambria Math" panose="02040503050406030204" pitchFamily="18" charset="0"/>
                                   <a:ea typeface="Verdana" panose="020B0604030504040204" pitchFamily="34" charset="0"/>
@@ -28171,7 +28840,7 @@
                               <m:r>
                                 <a:rPr lang="en-US" sz="2800" i="1">
                                   <a:solidFill>
-                                    <a:schemeClr val="bg1"/>
+                                    <a:srgbClr val="00B0F0"/>
                                   </a:solidFill>
                                   <a:latin typeface="Cambria Math" panose="02040503050406030204" pitchFamily="18" charset="0"/>
                                   <a:ea typeface="Verdana" panose="020B0604030504040204" pitchFamily="34" charset="0"/>
@@ -28181,7 +28850,7 @@
                             </m:sub>
                             <m:sup>
                               <m:r>
-                                <a:rPr lang="en-US" sz="2800" i="1">
+                                <a:rPr lang="en-US" sz="2800" i="1" smtClean="0">
                                   <a:solidFill>
                                     <a:schemeClr val="bg1"/>
                                   </a:solidFill>
@@ -28413,9 +29082,9 @@
                         </m:e>
                         <m:sub>
                           <m:r>
-                            <a:rPr lang="en-US" sz="2800" i="1">
+                            <a:rPr lang="en-US" sz="2800" i="1" smtClean="0">
                               <a:solidFill>
-                                <a:schemeClr val="bg1"/>
+                                <a:srgbClr val="FF0000"/>
                               </a:solidFill>
                               <a:latin typeface="Cambria Math" panose="02040503050406030204" pitchFamily="18" charset="0"/>
                               <a:ea typeface="Verdana" panose="020B0604030504040204" pitchFamily="34" charset="0"/>
@@ -28485,9 +29154,9 @@
                         <m:rPr>
                           <m:sty m:val="p"/>
                         </m:rPr>
-                        <a:rPr lang="el-GR" sz="2800" i="1">
+                        <a:rPr lang="el-GR" sz="2800" i="1" smtClean="0">
                           <a:solidFill>
-                            <a:schemeClr val="bg1"/>
+                            <a:srgbClr val="FF0000"/>
                           </a:solidFill>
                           <a:latin typeface="Cambria Math" panose="02040503050406030204" pitchFamily="18" charset="0"/>
                           <a:ea typeface="Verdana" panose="020B0604030504040204" pitchFamily="34" charset="0"/>
@@ -28533,9 +29202,9 @@
                             <m:t>=</m:t>
                           </m:r>
                           <m:r>
-                            <a:rPr lang="ru-RU" sz="2800" i="1">
+                            <a:rPr lang="ru-RU" sz="2800" i="1" smtClean="0">
                               <a:solidFill>
-                                <a:schemeClr val="bg1"/>
+                                <a:srgbClr val="7030A0"/>
                               </a:solidFill>
                               <a:latin typeface="Cambria Math" panose="02040503050406030204" pitchFamily="18" charset="0"/>
                               <a:ea typeface="Verdana" panose="020B0604030504040204" pitchFamily="34" charset="0"/>
@@ -28569,9 +29238,9 @@
                           <m:sSub>
                             <m:sSubPr>
                               <m:ctrlPr>
-                                <a:rPr lang="en-US" sz="2800" i="1">
+                                <a:rPr lang="en-US" sz="2800" i="1" smtClean="0">
                                   <a:solidFill>
-                                    <a:schemeClr val="bg1"/>
+                                    <a:srgbClr val="00B0F0"/>
                                   </a:solidFill>
                                   <a:latin typeface="Cambria Math" panose="02040503050406030204" pitchFamily="18" charset="0"/>
                                   <a:ea typeface="Verdana" panose="020B0604030504040204" pitchFamily="34" charset="0"/>
@@ -28582,7 +29251,7 @@
                               <m:r>
                                 <a:rPr lang="en-US" sz="2800" i="1">
                                   <a:solidFill>
-                                    <a:schemeClr val="bg1"/>
+                                    <a:srgbClr val="00B0F0"/>
                                   </a:solidFill>
                                   <a:latin typeface="Cambria Math" panose="02040503050406030204" pitchFamily="18" charset="0"/>
                                   <a:ea typeface="Verdana" panose="020B0604030504040204" pitchFamily="34" charset="0"/>
@@ -28594,7 +29263,7 @@
                               <m:r>
                                 <a:rPr lang="en-US" sz="2800" i="1">
                                   <a:solidFill>
-                                    <a:schemeClr val="bg1"/>
+                                    <a:srgbClr val="00B0F0"/>
                                   </a:solidFill>
                                   <a:latin typeface="Cambria Math" panose="02040503050406030204" pitchFamily="18" charset="0"/>
                                   <a:ea typeface="Verdana" panose="020B0604030504040204" pitchFamily="34" charset="0"/>
@@ -28775,7 +29444,7 @@
     </p:spTree>
     <p:extLst>
       <p:ext uri="{BB962C8B-B14F-4D97-AF65-F5344CB8AC3E}">
-        <p14:creationId xmlns:p14="http://schemas.microsoft.com/office/powerpoint/2010/main" val="167040515"/>
+        <p14:creationId xmlns:p14="http://schemas.microsoft.com/office/powerpoint/2010/main" val="1960436635"/>
       </p:ext>
     </p:extLst>
   </p:cSld>
@@ -29339,7 +30008,7 @@
           </a:lstStyle>
           <a:p>
             <a:r>
-              <a:rPr lang="ru-RU" sz="3200" b="1" dirty="0" smtClean="0">
+              <a:rPr lang="ru-RU" sz="3200" b="1" dirty="0">
                 <a:solidFill>
                   <a:schemeClr val="bg1"/>
                 </a:solidFill>
@@ -29349,7 +30018,7 @@
               <a:t>Регуляризация</a:t>
             </a:r>
             <a:r>
-              <a:rPr lang="en-US" sz="3200" b="1" dirty="0" smtClean="0">
+              <a:rPr lang="en-US" sz="3200" b="1" dirty="0">
                 <a:solidFill>
                   <a:schemeClr val="bg1"/>
                 </a:solidFill>
@@ -29359,7 +30028,7 @@
               <a:t> </a:t>
             </a:r>
             <a:r>
-              <a:rPr lang="ru-RU" sz="3200" b="1" dirty="0" smtClean="0">
+              <a:rPr lang="ru-RU" sz="3200" b="1" dirty="0">
                 <a:solidFill>
                   <a:schemeClr val="bg1"/>
                 </a:solidFill>
@@ -29369,7 +30038,7 @@
               <a:t>и</a:t>
             </a:r>
             <a:r>
-              <a:rPr lang="en-US" sz="3200" b="1" dirty="0" smtClean="0">
+              <a:rPr lang="en-US" sz="3200" b="1" dirty="0">
                 <a:solidFill>
                   <a:schemeClr val="bg1"/>
                 </a:solidFill>
@@ -29379,16 +30048,6 @@
               <a:t> </a:t>
             </a:r>
             <a:r>
-              <a:rPr lang="ru-RU" sz="3200" b="1" dirty="0" smtClean="0">
-                <a:solidFill>
-                  <a:schemeClr val="bg1"/>
-                </a:solidFill>
-                <a:latin typeface="Verdana" panose="020B0604030504040204" pitchFamily="34" charset="0"/>
-                <a:ea typeface="Verdana" panose="020B0604030504040204" pitchFamily="34" charset="0"/>
-              </a:rPr>
-              <a:t>Градиентный </a:t>
-            </a:r>
-            <a:r>
               <a:rPr lang="ru-RU" sz="3200" b="1" dirty="0">
                 <a:solidFill>
                   <a:schemeClr val="bg1"/>
@@ -29396,7 +30055,7 @@
                 <a:latin typeface="Verdana" panose="020B0604030504040204" pitchFamily="34" charset="0"/>
                 <a:ea typeface="Verdana" panose="020B0604030504040204" pitchFamily="34" charset="0"/>
               </a:rPr>
-              <a:t>спуск</a:t>
+              <a:t>Градиентный спуск</a:t>
             </a:r>
           </a:p>
         </p:txBody>
@@ -29463,9 +30122,9 @@
                         </m:e>
                         <m:sub>
                           <m:r>
-                            <a:rPr lang="en-US" sz="2800" i="1">
+                            <a:rPr lang="en-US" sz="2800" i="1" smtClean="0">
                               <a:solidFill>
-                                <a:schemeClr val="bg1"/>
+                                <a:srgbClr val="FF0000"/>
                               </a:solidFill>
                               <a:latin typeface="Cambria Math" panose="02040503050406030204" pitchFamily="18" charset="0"/>
                               <a:ea typeface="Verdana" panose="020B0604030504040204" pitchFamily="34" charset="0"/>
@@ -29535,9 +30194,9 @@
                         <m:rPr>
                           <m:sty m:val="p"/>
                         </m:rPr>
-                        <a:rPr lang="el-GR" sz="2800" i="1">
+                        <a:rPr lang="el-GR" sz="2800" i="1" smtClean="0">
                           <a:solidFill>
-                            <a:schemeClr val="bg1"/>
+                            <a:srgbClr val="FF0000"/>
                           </a:solidFill>
                           <a:latin typeface="Cambria Math" panose="02040503050406030204" pitchFamily="18" charset="0"/>
                           <a:ea typeface="Verdana" panose="020B0604030504040204" pitchFamily="34" charset="0"/>
@@ -29609,9 +30268,9 @@
                           <m:sSubSup>
                             <m:sSubSupPr>
                               <m:ctrlPr>
-                                <a:rPr lang="en-US" sz="2800" i="1">
+                                <a:rPr lang="en-US" sz="2800" i="1" smtClean="0">
                                   <a:solidFill>
-                                    <a:schemeClr val="bg1"/>
+                                    <a:srgbClr val="00B0F0"/>
                                   </a:solidFill>
                                   <a:latin typeface="Cambria Math" panose="02040503050406030204" pitchFamily="18" charset="0"/>
                                   <a:ea typeface="Verdana" panose="020B0604030504040204" pitchFamily="34" charset="0"/>
@@ -29622,7 +30281,7 @@
                               <m:r>
                                 <a:rPr lang="en-US" sz="2800" i="1">
                                   <a:solidFill>
-                                    <a:schemeClr val="bg1"/>
+                                    <a:srgbClr val="00B0F0"/>
                                   </a:solidFill>
                                   <a:latin typeface="Cambria Math" panose="02040503050406030204" pitchFamily="18" charset="0"/>
                                   <a:ea typeface="Verdana" panose="020B0604030504040204" pitchFamily="34" charset="0"/>
@@ -29634,7 +30293,7 @@
                               <m:r>
                                 <a:rPr lang="en-US" sz="2800" i="1">
                                   <a:solidFill>
-                                    <a:schemeClr val="bg1"/>
+                                    <a:srgbClr val="00B0F0"/>
                                   </a:solidFill>
                                   <a:latin typeface="Cambria Math" panose="02040503050406030204" pitchFamily="18" charset="0"/>
                                   <a:ea typeface="Verdana" panose="020B0604030504040204" pitchFamily="34" charset="0"/>
@@ -29644,7 +30303,7 @@
                             </m:sub>
                             <m:sup>
                               <m:r>
-                                <a:rPr lang="en-US" sz="2800" i="1">
+                                <a:rPr lang="en-US" sz="2800" i="1" smtClean="0">
                                   <a:solidFill>
                                     <a:schemeClr val="bg1"/>
                                   </a:solidFill>
@@ -29876,9 +30535,9 @@
                         </m:e>
                         <m:sub>
                           <m:r>
-                            <a:rPr lang="en-US" sz="2800" i="1">
+                            <a:rPr lang="en-US" sz="2800" i="1" smtClean="0">
                               <a:solidFill>
-                                <a:schemeClr val="bg1"/>
+                                <a:srgbClr val="FF0000"/>
                               </a:solidFill>
                               <a:latin typeface="Cambria Math" panose="02040503050406030204" pitchFamily="18" charset="0"/>
                               <a:ea typeface="Verdana" panose="020B0604030504040204" pitchFamily="34" charset="0"/>
@@ -29948,9 +30607,9 @@
                         <m:rPr>
                           <m:sty m:val="p"/>
                         </m:rPr>
-                        <a:rPr lang="el-GR" sz="2800" i="1">
+                        <a:rPr lang="el-GR" sz="2800" i="1" smtClean="0">
                           <a:solidFill>
-                            <a:schemeClr val="bg1"/>
+                            <a:srgbClr val="FF0000"/>
                           </a:solidFill>
                           <a:latin typeface="Cambria Math" panose="02040503050406030204" pitchFamily="18" charset="0"/>
                           <a:ea typeface="Verdana" panose="020B0604030504040204" pitchFamily="34" charset="0"/>
@@ -30032,9 +30691,9 @@
                           <m:sSub>
                             <m:sSubPr>
                               <m:ctrlPr>
-                                <a:rPr lang="en-US" sz="2800" i="1">
+                                <a:rPr lang="en-US" sz="2800" i="1" smtClean="0">
                                   <a:solidFill>
-                                    <a:schemeClr val="bg1"/>
+                                    <a:srgbClr val="00B0F0"/>
                                   </a:solidFill>
                                   <a:latin typeface="Cambria Math" panose="02040503050406030204" pitchFamily="18" charset="0"/>
                                   <a:ea typeface="Verdana" panose="020B0604030504040204" pitchFamily="34" charset="0"/>
@@ -30045,7 +30704,7 @@
                               <m:r>
                                 <a:rPr lang="en-US" sz="2800" i="1">
                                   <a:solidFill>
-                                    <a:schemeClr val="bg1"/>
+                                    <a:srgbClr val="00B0F0"/>
                                   </a:solidFill>
                                   <a:latin typeface="Cambria Math" panose="02040503050406030204" pitchFamily="18" charset="0"/>
                                   <a:ea typeface="Verdana" panose="020B0604030504040204" pitchFamily="34" charset="0"/>
@@ -30057,7 +30716,7 @@
                               <m:r>
                                 <a:rPr lang="en-US" sz="2800" i="1">
                                   <a:solidFill>
-                                    <a:schemeClr val="bg1"/>
+                                    <a:srgbClr val="00B0F0"/>
                                   </a:solidFill>
                                   <a:latin typeface="Cambria Math" panose="02040503050406030204" pitchFamily="18" charset="0"/>
                                   <a:ea typeface="Verdana" panose="020B0604030504040204" pitchFamily="34" charset="0"/>
@@ -30276,7 +30935,7 @@
                           <m:ctrlPr>
                             <a:rPr lang="en-US" sz="2800" i="1" smtClean="0">
                               <a:solidFill>
-                                <a:schemeClr val="bg1"/>
+                                <a:srgbClr val="00B0F0"/>
                               </a:solidFill>
                               <a:latin typeface="Cambria Math" panose="02040503050406030204" pitchFamily="18" charset="0"/>
                               <a:ea typeface="Verdana" panose="020B0604030504040204" pitchFamily="34" charset="0"/>
@@ -30287,7 +30946,7 @@
                           <m:r>
                             <a:rPr lang="en-US" sz="2800" i="1">
                               <a:solidFill>
-                                <a:schemeClr val="bg1"/>
+                                <a:srgbClr val="00B0F0"/>
                               </a:solidFill>
                               <a:latin typeface="Cambria Math" panose="02040503050406030204" pitchFamily="18" charset="0"/>
                               <a:ea typeface="Verdana" panose="020B0604030504040204" pitchFamily="34" charset="0"/>
@@ -30299,7 +30958,7 @@
                           <m:r>
                             <a:rPr lang="en-US" sz="2800" b="0" i="1" smtClean="0">
                               <a:solidFill>
-                                <a:schemeClr val="bg1"/>
+                                <a:srgbClr val="00B0F0"/>
                               </a:solidFill>
                               <a:latin typeface="Cambria Math" panose="02040503050406030204" pitchFamily="18" charset="0"/>
                               <a:ea typeface="Verdana" panose="020B0604030504040204" pitchFamily="34" charset="0"/>
@@ -30321,9 +30980,9 @@
                       <m:sSub>
                         <m:sSubPr>
                           <m:ctrlPr>
-                            <a:rPr lang="en-US" sz="2800" i="1">
+                            <a:rPr lang="en-US" sz="2800" i="1" smtClean="0">
                               <a:solidFill>
-                                <a:schemeClr val="bg1"/>
+                                <a:srgbClr val="00B0F0"/>
                               </a:solidFill>
                               <a:latin typeface="Cambria Math" panose="02040503050406030204" pitchFamily="18" charset="0"/>
                               <a:ea typeface="Verdana" panose="020B0604030504040204" pitchFamily="34" charset="0"/>
@@ -30334,7 +30993,7 @@
                           <m:r>
                             <a:rPr lang="en-US" sz="2800" i="1">
                               <a:solidFill>
-                                <a:schemeClr val="bg1"/>
+                                <a:srgbClr val="00B0F0"/>
                               </a:solidFill>
                               <a:latin typeface="Cambria Math" panose="02040503050406030204" pitchFamily="18" charset="0"/>
                               <a:ea typeface="Verdana" panose="020B0604030504040204" pitchFamily="34" charset="0"/>
@@ -30346,7 +31005,7 @@
                           <m:r>
                             <a:rPr lang="en-US" sz="2800" b="0" i="1" smtClean="0">
                               <a:solidFill>
-                                <a:schemeClr val="bg1"/>
+                                <a:srgbClr val="00B0F0"/>
                               </a:solidFill>
                               <a:latin typeface="Cambria Math" panose="02040503050406030204" pitchFamily="18" charset="0"/>
                               <a:ea typeface="Verdana" panose="020B0604030504040204" pitchFamily="34" charset="0"/>
@@ -30369,9 +31028,9 @@
                         <m:rPr>
                           <m:sty m:val="p"/>
                         </m:rPr>
-                        <a:rPr lang="el-GR" sz="2800" b="1" i="1">
+                        <a:rPr lang="el-GR" sz="2800" b="1" i="1" smtClean="0">
                           <a:solidFill>
-                            <a:schemeClr val="bg1"/>
+                            <a:srgbClr val="FF0000"/>
                           </a:solidFill>
                           <a:latin typeface="Cambria Math" panose="02040503050406030204" pitchFamily="18" charset="0"/>
                         </a:rPr>
@@ -30433,7 +31092,7 @@
                               <m:ctrlPr>
                                 <a:rPr lang="en-US" sz="2800" b="0" i="1" smtClean="0">
                                   <a:solidFill>
-                                    <a:schemeClr val="bg1"/>
+                                    <a:srgbClr val="00B0F0"/>
                                   </a:solidFill>
                                   <a:latin typeface="Cambria Math" panose="02040503050406030204" pitchFamily="18" charset="0"/>
                                 </a:rPr>
@@ -30443,7 +31102,7 @@
                               <m:r>
                                 <a:rPr lang="en-US" sz="2800" i="1">
                                   <a:solidFill>
-                                    <a:schemeClr val="bg1"/>
+                                    <a:srgbClr val="00B0F0"/>
                                   </a:solidFill>
                                   <a:latin typeface="Cambria Math" panose="02040503050406030204" pitchFamily="18" charset="0"/>
                                 </a:rPr>
@@ -30454,7 +31113,7 @@
                               <m:r>
                                 <a:rPr lang="en-US" sz="2800" b="0" i="1" smtClean="0">
                                   <a:solidFill>
-                                    <a:schemeClr val="bg1"/>
+                                    <a:srgbClr val="00B0F0"/>
                                   </a:solidFill>
                                   <a:latin typeface="Cambria Math" panose="02040503050406030204" pitchFamily="18" charset="0"/>
                                 </a:rPr>
@@ -30600,7 +31259,7 @@
                               <m:ctrlPr>
                                 <a:rPr lang="en-US" sz="2600" b="0" i="1" smtClean="0">
                                   <a:solidFill>
-                                    <a:schemeClr val="bg1"/>
+                                    <a:srgbClr val="00B0F0"/>
                                   </a:solidFill>
                                   <a:latin typeface="Cambria Math" panose="02040503050406030204" pitchFamily="18" charset="0"/>
                                 </a:rPr>
@@ -30610,7 +31269,7 @@
                               <m:r>
                                 <a:rPr lang="en-US" sz="2600" b="0" i="1" smtClean="0">
                                   <a:solidFill>
-                                    <a:schemeClr val="bg1"/>
+                                    <a:srgbClr val="00B0F0"/>
                                   </a:solidFill>
                                   <a:latin typeface="Cambria Math" panose="02040503050406030204" pitchFamily="18" charset="0"/>
                                 </a:rPr>
@@ -30621,7 +31280,7 @@
                               <m:r>
                                 <a:rPr lang="en-US" sz="2600" b="0" i="1" smtClean="0">
                                   <a:solidFill>
-                                    <a:schemeClr val="bg1"/>
+                                    <a:srgbClr val="00B0F0"/>
                                   </a:solidFill>
                                   <a:latin typeface="Cambria Math" panose="02040503050406030204" pitchFamily="18" charset="0"/>
                                 </a:rPr>
@@ -30933,9 +31592,9 @@
                         <m:rPr>
                           <m:sty m:val="p"/>
                         </m:rPr>
-                        <a:rPr lang="el-GR" sz="2400" i="1">
+                        <a:rPr lang="el-GR" sz="2400" i="1" smtClean="0">
                           <a:solidFill>
-                            <a:schemeClr val="bg1"/>
+                            <a:srgbClr val="FF0000"/>
                           </a:solidFill>
                           <a:latin typeface="Cambria Math" panose="02040503050406030204" pitchFamily="18" charset="0"/>
                           <a:ea typeface="Verdana" panose="020B0604030504040204" pitchFamily="34" charset="0"/>
@@ -30955,9 +31614,9 @@
                       <m:sSub>
                         <m:sSubPr>
                           <m:ctrlPr>
-                            <a:rPr lang="en-US" sz="2400" i="1">
+                            <a:rPr lang="en-US" sz="2400" i="1" smtClean="0">
                               <a:solidFill>
-                                <a:schemeClr val="bg1"/>
+                                <a:srgbClr val="00B0F0"/>
                               </a:solidFill>
                               <a:latin typeface="Cambria Math" panose="02040503050406030204" pitchFamily="18" charset="0"/>
                               <a:ea typeface="Verdana" panose="020B0604030504040204" pitchFamily="34" charset="0"/>
@@ -30968,7 +31627,7 @@
                           <m:r>
                             <a:rPr lang="en-US" sz="2400" i="1">
                               <a:solidFill>
-                                <a:schemeClr val="bg1"/>
+                                <a:srgbClr val="00B0F0"/>
                               </a:solidFill>
                               <a:latin typeface="Cambria Math" panose="02040503050406030204" pitchFamily="18" charset="0"/>
                               <a:ea typeface="Verdana" panose="020B0604030504040204" pitchFamily="34" charset="0"/>
@@ -30980,7 +31639,7 @@
                           <m:r>
                             <a:rPr lang="en-US" sz="2400" i="1">
                               <a:solidFill>
-                                <a:schemeClr val="bg1"/>
+                                <a:srgbClr val="00B0F0"/>
                               </a:solidFill>
                               <a:latin typeface="Cambria Math" panose="02040503050406030204" pitchFamily="18" charset="0"/>
                               <a:ea typeface="Verdana" panose="020B0604030504040204" pitchFamily="34" charset="0"/>
@@ -31129,7 +31788,7 @@
                               <m:ctrlPr>
                                 <a:rPr lang="en-US" sz="2600" b="0" i="1" smtClean="0">
                                   <a:solidFill>
-                                    <a:schemeClr val="bg1"/>
+                                    <a:srgbClr val="00B0F0"/>
                                   </a:solidFill>
                                   <a:latin typeface="Cambria Math" panose="02040503050406030204" pitchFamily="18" charset="0"/>
                                 </a:rPr>
@@ -31139,7 +31798,7 @@
                               <m:r>
                                 <a:rPr lang="en-US" sz="2600" b="0" i="1" smtClean="0">
                                   <a:solidFill>
-                                    <a:schemeClr val="bg1"/>
+                                    <a:srgbClr val="00B0F0"/>
                                   </a:solidFill>
                                   <a:latin typeface="Cambria Math" panose="02040503050406030204" pitchFamily="18" charset="0"/>
                                 </a:rPr>
@@ -31150,7 +31809,7 @@
                               <m:r>
                                 <a:rPr lang="en-US" sz="2600" b="0" i="1" smtClean="0">
                                   <a:solidFill>
-                                    <a:schemeClr val="bg1"/>
+                                    <a:srgbClr val="00B0F0"/>
                                   </a:solidFill>
                                   <a:latin typeface="Cambria Math" panose="02040503050406030204" pitchFamily="18" charset="0"/>
                                 </a:rPr>
@@ -31465,9 +32124,9 @@
                         <m:rPr>
                           <m:sty m:val="p"/>
                         </m:rPr>
-                        <a:rPr lang="el-GR" sz="2400" i="1">
+                        <a:rPr lang="el-GR" sz="2400" i="1" smtClean="0">
                           <a:solidFill>
-                            <a:schemeClr val="bg1"/>
+                            <a:srgbClr val="FF0000"/>
                           </a:solidFill>
                           <a:latin typeface="Cambria Math" panose="02040503050406030204" pitchFamily="18" charset="0"/>
                           <a:ea typeface="Verdana" panose="020B0604030504040204" pitchFamily="34" charset="0"/>
@@ -31507,9 +32166,9 @@
                       <m:sSub>
                         <m:sSubPr>
                           <m:ctrlPr>
-                            <a:rPr lang="en-US" sz="2400" i="1">
+                            <a:rPr lang="en-US" sz="2400" i="1" smtClean="0">
                               <a:solidFill>
-                                <a:schemeClr val="bg1"/>
+                                <a:srgbClr val="00B0F0"/>
                               </a:solidFill>
                               <a:latin typeface="Cambria Math" panose="02040503050406030204" pitchFamily="18" charset="0"/>
                               <a:ea typeface="Verdana" panose="020B0604030504040204" pitchFamily="34" charset="0"/>
@@ -31520,7 +32179,7 @@
                           <m:r>
                             <a:rPr lang="en-US" sz="2400" i="1">
                               <a:solidFill>
-                                <a:schemeClr val="bg1"/>
+                                <a:srgbClr val="00B0F0"/>
                               </a:solidFill>
                               <a:latin typeface="Cambria Math" panose="02040503050406030204" pitchFamily="18" charset="0"/>
                               <a:ea typeface="Verdana" panose="020B0604030504040204" pitchFamily="34" charset="0"/>
@@ -31532,7 +32191,7 @@
                           <m:r>
                             <a:rPr lang="en-US" sz="2400" i="1">
                               <a:solidFill>
-                                <a:schemeClr val="bg1"/>
+                                <a:srgbClr val="00B0F0"/>
                               </a:solidFill>
                               <a:latin typeface="Cambria Math" panose="02040503050406030204" pitchFamily="18" charset="0"/>
                               <a:ea typeface="Verdana" panose="020B0604030504040204" pitchFamily="34" charset="0"/>
@@ -31649,7 +32308,7 @@
                           <m:ctrlPr>
                             <a:rPr lang="en-US" sz="2800" i="1" smtClean="0">
                               <a:solidFill>
-                                <a:schemeClr val="bg1"/>
+                                <a:srgbClr val="00B0F0"/>
                               </a:solidFill>
                               <a:latin typeface="Cambria Math" panose="02040503050406030204" pitchFamily="18" charset="0"/>
                               <a:ea typeface="Verdana" panose="020B0604030504040204" pitchFamily="34" charset="0"/>
@@ -31660,7 +32319,7 @@
                           <m:r>
                             <a:rPr lang="en-US" sz="2800" i="1">
                               <a:solidFill>
-                                <a:schemeClr val="bg1"/>
+                                <a:srgbClr val="00B0F0"/>
                               </a:solidFill>
                               <a:latin typeface="Cambria Math" panose="02040503050406030204" pitchFamily="18" charset="0"/>
                               <a:ea typeface="Verdana" panose="020B0604030504040204" pitchFamily="34" charset="0"/>
@@ -31672,7 +32331,7 @@
                           <m:r>
                             <a:rPr lang="en-US" sz="2800" b="0" i="1" smtClean="0">
                               <a:solidFill>
-                                <a:schemeClr val="bg1"/>
+                                <a:srgbClr val="00B0F0"/>
                               </a:solidFill>
                               <a:latin typeface="Cambria Math" panose="02040503050406030204" pitchFamily="18" charset="0"/>
                               <a:ea typeface="Verdana" panose="020B0604030504040204" pitchFamily="34" charset="0"/>
@@ -31694,9 +32353,9 @@
                       <m:sSub>
                         <m:sSubPr>
                           <m:ctrlPr>
-                            <a:rPr lang="en-US" sz="2800" i="1">
+                            <a:rPr lang="en-US" sz="2800" i="1" smtClean="0">
                               <a:solidFill>
-                                <a:schemeClr val="bg1"/>
+                                <a:srgbClr val="00B0F0"/>
                               </a:solidFill>
                               <a:latin typeface="Cambria Math" panose="02040503050406030204" pitchFamily="18" charset="0"/>
                               <a:ea typeface="Verdana" panose="020B0604030504040204" pitchFamily="34" charset="0"/>
@@ -31707,7 +32366,7 @@
                           <m:r>
                             <a:rPr lang="en-US" sz="2800" i="1">
                               <a:solidFill>
-                                <a:schemeClr val="bg1"/>
+                                <a:srgbClr val="00B0F0"/>
                               </a:solidFill>
                               <a:latin typeface="Cambria Math" panose="02040503050406030204" pitchFamily="18" charset="0"/>
                               <a:ea typeface="Verdana" panose="020B0604030504040204" pitchFamily="34" charset="0"/>
@@ -31719,7 +32378,7 @@
                           <m:r>
                             <a:rPr lang="en-US" sz="2800" b="0" i="1" smtClean="0">
                               <a:solidFill>
-                                <a:schemeClr val="bg1"/>
+                                <a:srgbClr val="00B0F0"/>
                               </a:solidFill>
                               <a:latin typeface="Cambria Math" panose="02040503050406030204" pitchFamily="18" charset="0"/>
                               <a:ea typeface="Verdana" panose="020B0604030504040204" pitchFamily="34" charset="0"/>
@@ -31742,9 +32401,9 @@
                         <m:rPr>
                           <m:sty m:val="p"/>
                         </m:rPr>
-                        <a:rPr lang="el-GR" sz="2800" b="1" i="1">
+                        <a:rPr lang="el-GR" sz="2800" b="1" i="1" smtClean="0">
                           <a:solidFill>
-                            <a:schemeClr val="bg1"/>
+                            <a:srgbClr val="FF0000"/>
                           </a:solidFill>
                           <a:latin typeface="Cambria Math" panose="02040503050406030204" pitchFamily="18" charset="0"/>
                         </a:rPr>
@@ -31806,7 +32465,7 @@
                               <m:ctrlPr>
                                 <a:rPr lang="en-US" sz="2800" b="0" i="1" smtClean="0">
                                   <a:solidFill>
-                                    <a:schemeClr val="bg1"/>
+                                    <a:srgbClr val="00B0F0"/>
                                   </a:solidFill>
                                   <a:latin typeface="Cambria Math" panose="02040503050406030204" pitchFamily="18" charset="0"/>
                                 </a:rPr>
@@ -31816,7 +32475,7 @@
                               <m:r>
                                 <a:rPr lang="en-US" sz="2800" i="1">
                                   <a:solidFill>
-                                    <a:schemeClr val="bg1"/>
+                                    <a:srgbClr val="00B0F0"/>
                                   </a:solidFill>
                                   <a:latin typeface="Cambria Math" panose="02040503050406030204" pitchFamily="18" charset="0"/>
                                 </a:rPr>
@@ -31827,7 +32486,7 @@
                               <m:r>
                                 <a:rPr lang="en-US" sz="2800" b="0" i="1" smtClean="0">
                                   <a:solidFill>
-                                    <a:schemeClr val="bg1"/>
+                                    <a:srgbClr val="00B0F0"/>
                                   </a:solidFill>
                                   <a:latin typeface="Cambria Math" panose="02040503050406030204" pitchFamily="18" charset="0"/>
                                 </a:rPr>
@@ -31893,7 +32552,7 @@
     </p:spTree>
     <p:extLst>
       <p:ext uri="{BB962C8B-B14F-4D97-AF65-F5344CB8AC3E}">
-        <p14:creationId xmlns:p14="http://schemas.microsoft.com/office/powerpoint/2010/main" val="3591711305"/>
+        <p14:creationId xmlns:p14="http://schemas.microsoft.com/office/powerpoint/2010/main" val="2077948012"/>
       </p:ext>
     </p:extLst>
   </p:cSld>
@@ -32595,7 +33254,7 @@
           </a:lstStyle>
           <a:p>
             <a:r>
-              <a:rPr lang="ru-RU" sz="3200" b="1" dirty="0" smtClean="0">
+              <a:rPr lang="ru-RU" sz="3200" b="1" dirty="0">
                 <a:solidFill>
                   <a:schemeClr val="bg1"/>
                 </a:solidFill>
@@ -32605,7 +33264,7 @@
               <a:t>Регуляризация и</a:t>
             </a:r>
             <a:r>
-              <a:rPr lang="en-US" sz="3200" b="1" dirty="0" smtClean="0">
+              <a:rPr lang="en-US" sz="3200" b="1" dirty="0">
                 <a:solidFill>
                   <a:schemeClr val="bg1"/>
                 </a:solidFill>
@@ -32877,7 +33536,7 @@
                           <m:ctrlPr>
                             <a:rPr lang="en-US" sz="3200" i="1" smtClean="0">
                               <a:solidFill>
-                                <a:schemeClr val="bg1"/>
+                                <a:srgbClr val="00B0F0"/>
                               </a:solidFill>
                               <a:latin typeface="Cambria Math" panose="02040503050406030204" pitchFamily="18" charset="0"/>
                               <a:ea typeface="Verdana" panose="020B0604030504040204" pitchFamily="34" charset="0"/>
@@ -32888,7 +33547,7 @@
                           <m:r>
                             <a:rPr lang="en-US" sz="3200" i="1">
                               <a:solidFill>
-                                <a:schemeClr val="bg1"/>
+                                <a:srgbClr val="00B0F0"/>
                               </a:solidFill>
                               <a:latin typeface="Cambria Math" panose="02040503050406030204" pitchFamily="18" charset="0"/>
                               <a:ea typeface="Verdana" panose="020B0604030504040204" pitchFamily="34" charset="0"/>
@@ -32900,7 +33559,7 @@
                           <m:r>
                             <a:rPr lang="ru-RU" sz="3200" b="0" i="1" smtClean="0">
                               <a:solidFill>
-                                <a:schemeClr val="bg1"/>
+                                <a:srgbClr val="00B0F0"/>
                               </a:solidFill>
                               <a:latin typeface="Cambria Math" panose="02040503050406030204" pitchFamily="18" charset="0"/>
                               <a:ea typeface="Verdana" panose="020B0604030504040204" pitchFamily="34" charset="0"/>
@@ -33003,7 +33662,7 @@
                           <m:ctrlPr>
                             <a:rPr lang="en-US" sz="3200" i="1" smtClean="0">
                               <a:solidFill>
-                                <a:schemeClr val="bg1"/>
+                                <a:srgbClr val="00B0F0"/>
                               </a:solidFill>
                               <a:latin typeface="Cambria Math" panose="02040503050406030204" pitchFamily="18" charset="0"/>
                               <a:ea typeface="Verdana" panose="020B0604030504040204" pitchFamily="34" charset="0"/>
@@ -33014,7 +33673,7 @@
                           <m:r>
                             <a:rPr lang="en-US" sz="3200" i="1">
                               <a:solidFill>
-                                <a:schemeClr val="bg1"/>
+                                <a:srgbClr val="00B0F0"/>
                               </a:solidFill>
                               <a:latin typeface="Cambria Math" panose="02040503050406030204" pitchFamily="18" charset="0"/>
                               <a:ea typeface="Verdana" panose="020B0604030504040204" pitchFamily="34" charset="0"/>
@@ -33026,7 +33685,7 @@
                           <m:r>
                             <a:rPr lang="ru-RU" sz="3200" b="0" i="1" smtClean="0">
                               <a:solidFill>
-                                <a:schemeClr val="bg1"/>
+                                <a:srgbClr val="00B0F0"/>
                               </a:solidFill>
                               <a:latin typeface="Cambria Math" panose="02040503050406030204" pitchFamily="18" charset="0"/>
                               <a:ea typeface="Verdana" panose="020B0604030504040204" pitchFamily="34" charset="0"/>
@@ -33217,7 +33876,7 @@
                           <m:ctrlPr>
                             <a:rPr lang="en-US" sz="3200" i="1" smtClean="0">
                               <a:solidFill>
-                                <a:schemeClr val="bg1"/>
+                                <a:srgbClr val="00B0F0"/>
                               </a:solidFill>
                               <a:latin typeface="Cambria Math" panose="02040503050406030204" pitchFamily="18" charset="0"/>
                               <a:ea typeface="Verdana" panose="020B0604030504040204" pitchFamily="34" charset="0"/>
@@ -33228,7 +33887,7 @@
                           <m:r>
                             <a:rPr lang="en-US" sz="3200" i="1">
                               <a:solidFill>
-                                <a:schemeClr val="bg1"/>
+                                <a:srgbClr val="00B0F0"/>
                               </a:solidFill>
                               <a:latin typeface="Cambria Math" panose="02040503050406030204" pitchFamily="18" charset="0"/>
                               <a:ea typeface="Verdana" panose="020B0604030504040204" pitchFamily="34" charset="0"/>
@@ -33240,7 +33899,7 @@
                           <m:r>
                             <a:rPr lang="ru-RU" sz="3200" b="0" i="1" smtClean="0">
                               <a:solidFill>
-                                <a:schemeClr val="bg1"/>
+                                <a:srgbClr val="00B0F0"/>
                               </a:solidFill>
                               <a:latin typeface="Cambria Math" panose="02040503050406030204" pitchFamily="18" charset="0"/>
                               <a:ea typeface="Verdana" panose="020B0604030504040204" pitchFamily="34" charset="0"/>
@@ -33343,7 +34002,7 @@
                           <m:ctrlPr>
                             <a:rPr lang="en-US" sz="3200" i="1" smtClean="0">
                               <a:solidFill>
-                                <a:schemeClr val="bg1"/>
+                                <a:srgbClr val="00B0F0"/>
                               </a:solidFill>
                               <a:latin typeface="Cambria Math" panose="02040503050406030204" pitchFamily="18" charset="0"/>
                               <a:ea typeface="Verdana" panose="020B0604030504040204" pitchFamily="34" charset="0"/>
@@ -33354,7 +34013,7 @@
                           <m:r>
                             <a:rPr lang="en-US" sz="3200" i="1">
                               <a:solidFill>
-                                <a:schemeClr val="bg1"/>
+                                <a:srgbClr val="00B0F0"/>
                               </a:solidFill>
                               <a:latin typeface="Cambria Math" panose="02040503050406030204" pitchFamily="18" charset="0"/>
                               <a:ea typeface="Verdana" panose="020B0604030504040204" pitchFamily="34" charset="0"/>
@@ -33366,7 +34025,7 @@
                           <m:r>
                             <a:rPr lang="ru-RU" sz="3200" b="0" i="1" smtClean="0">
                               <a:solidFill>
-                                <a:schemeClr val="bg1"/>
+                                <a:srgbClr val="00B0F0"/>
                               </a:solidFill>
                               <a:latin typeface="Cambria Math" panose="02040503050406030204" pitchFamily="18" charset="0"/>
                               <a:ea typeface="Verdana" panose="020B0604030504040204" pitchFamily="34" charset="0"/>
@@ -33484,7 +34143,7 @@
                               <m:ctrlPr>
                                 <a:rPr lang="en-US" sz="2800" i="1" smtClean="0">
                                   <a:solidFill>
-                                    <a:schemeClr val="bg1"/>
+                                    <a:srgbClr val="00B0F0"/>
                                   </a:solidFill>
                                   <a:latin typeface="Cambria Math" panose="02040503050406030204" pitchFamily="18" charset="0"/>
                                   <a:ea typeface="Verdana" panose="020B0604030504040204" pitchFamily="34" charset="0"/>
@@ -33495,7 +34154,7 @@
                               <m:r>
                                 <a:rPr lang="en-US" sz="2800" i="1">
                                   <a:solidFill>
-                                    <a:schemeClr val="bg1"/>
+                                    <a:srgbClr val="00B0F0"/>
                                   </a:solidFill>
                                   <a:latin typeface="Cambria Math" panose="02040503050406030204" pitchFamily="18" charset="0"/>
                                   <a:ea typeface="Verdana" panose="020B0604030504040204" pitchFamily="34" charset="0"/>
@@ -33507,7 +34166,7 @@
                               <m:r>
                                 <a:rPr lang="en-US" sz="2800" b="0" i="1" smtClean="0">
                                   <a:solidFill>
-                                    <a:schemeClr val="bg1"/>
+                                    <a:srgbClr val="00B0F0"/>
                                   </a:solidFill>
                                   <a:latin typeface="Cambria Math" panose="02040503050406030204" pitchFamily="18" charset="0"/>
                                   <a:ea typeface="Verdana" panose="020B0604030504040204" pitchFamily="34" charset="0"/>
@@ -33546,9 +34205,9 @@
                           <m:sSub>
                             <m:sSubPr>
                               <m:ctrlPr>
-                                <a:rPr lang="en-US" sz="2800" i="1">
+                                <a:rPr lang="en-US" sz="2800" i="1" smtClean="0">
                                   <a:solidFill>
-                                    <a:schemeClr val="bg1"/>
+                                    <a:srgbClr val="00B0F0"/>
                                   </a:solidFill>
                                   <a:latin typeface="Cambria Math" panose="02040503050406030204" pitchFamily="18" charset="0"/>
                                   <a:ea typeface="Verdana" panose="020B0604030504040204" pitchFamily="34" charset="0"/>
@@ -33559,7 +34218,7 @@
                               <m:r>
                                 <a:rPr lang="en-US" sz="2800" i="1">
                                   <a:solidFill>
-                                    <a:schemeClr val="bg1"/>
+                                    <a:srgbClr val="00B0F0"/>
                                   </a:solidFill>
                                   <a:latin typeface="Cambria Math" panose="02040503050406030204" pitchFamily="18" charset="0"/>
                                   <a:ea typeface="Verdana" panose="020B0604030504040204" pitchFamily="34" charset="0"/>
@@ -33571,7 +34230,7 @@
                               <m:r>
                                 <a:rPr lang="ru-RU" sz="2800" b="0" i="1" smtClean="0">
                                   <a:solidFill>
-                                    <a:schemeClr val="bg1"/>
+                                    <a:srgbClr val="00B0F0"/>
                                   </a:solidFill>
                                   <a:latin typeface="Cambria Math" panose="02040503050406030204" pitchFamily="18" charset="0"/>
                                   <a:ea typeface="Verdana" panose="020B0604030504040204" pitchFamily="34" charset="0"/>
@@ -33616,9 +34275,9 @@
                         <m:rPr>
                           <m:sty m:val="p"/>
                         </m:rPr>
-                        <a:rPr lang="el-GR" sz="2800" i="1">
+                        <a:rPr lang="el-GR" sz="2800" i="1" smtClean="0">
                           <a:solidFill>
-                            <a:schemeClr val="bg1"/>
+                            <a:srgbClr val="FF0000"/>
                           </a:solidFill>
                           <a:latin typeface="Cambria Math" panose="02040503050406030204" pitchFamily="18" charset="0"/>
                           <a:ea typeface="Verdana" panose="020B0604030504040204" pitchFamily="34" charset="0"/>
@@ -33719,7 +34378,7 @@
                           <m:ctrlPr>
                             <a:rPr lang="en-US" sz="2800" b="0" i="1" smtClean="0">
                               <a:solidFill>
-                                <a:schemeClr val="bg1"/>
+                                <a:srgbClr val="00B0F0"/>
                               </a:solidFill>
                               <a:latin typeface="Cambria Math" panose="02040503050406030204" pitchFamily="18" charset="0"/>
                               <a:ea typeface="Verdana" panose="020B0604030504040204" pitchFamily="34" charset="0"/>
@@ -33730,7 +34389,7 @@
                           <m:r>
                             <a:rPr lang="en-US" sz="2800" i="1">
                               <a:solidFill>
-                                <a:schemeClr val="bg1"/>
+                                <a:srgbClr val="00B0F0"/>
                               </a:solidFill>
                               <a:latin typeface="Cambria Math" panose="02040503050406030204" pitchFamily="18" charset="0"/>
                               <a:ea typeface="Verdana" panose="020B0604030504040204" pitchFamily="34" charset="0"/>
@@ -33742,7 +34401,7 @@
                           <m:r>
                             <a:rPr lang="en-US" sz="2800" i="1">
                               <a:solidFill>
-                                <a:schemeClr val="bg1"/>
+                                <a:srgbClr val="00B0F0"/>
                               </a:solidFill>
                               <a:latin typeface="Cambria Math" panose="02040503050406030204" pitchFamily="18" charset="0"/>
                               <a:ea typeface="Verdana" panose="020B0604030504040204" pitchFamily="34" charset="0"/>
@@ -33788,7 +34447,7 @@
                           <m:ctrlPr>
                             <a:rPr lang="en-US" sz="2800" b="0" i="1" smtClean="0">
                               <a:solidFill>
-                                <a:schemeClr val="bg1"/>
+                                <a:srgbClr val="00B0F0"/>
                               </a:solidFill>
                               <a:latin typeface="Cambria Math" panose="02040503050406030204" pitchFamily="18" charset="0"/>
                               <a:ea typeface="Verdana" panose="020B0604030504040204" pitchFamily="34" charset="0"/>
@@ -33799,7 +34458,7 @@
                           <m:r>
                             <a:rPr lang="en-US" sz="2800" i="1">
                               <a:solidFill>
-                                <a:schemeClr val="bg1"/>
+                                <a:srgbClr val="00B0F0"/>
                               </a:solidFill>
                               <a:latin typeface="Cambria Math" panose="02040503050406030204" pitchFamily="18" charset="0"/>
                               <a:ea typeface="Verdana" panose="020B0604030504040204" pitchFamily="34" charset="0"/>
@@ -33811,7 +34470,7 @@
                           <m:r>
                             <a:rPr lang="ru-RU" sz="2800" b="0" i="1" smtClean="0">
                               <a:solidFill>
-                                <a:schemeClr val="bg1"/>
+                                <a:srgbClr val="00B0F0"/>
                               </a:solidFill>
                               <a:latin typeface="Cambria Math" panose="02040503050406030204" pitchFamily="18" charset="0"/>
                               <a:ea typeface="Verdana" panose="020B0604030504040204" pitchFamily="34" charset="0"/>
@@ -33866,9 +34525,9 @@
                         <m:rPr>
                           <m:sty m:val="p"/>
                         </m:rPr>
-                        <a:rPr lang="el-GR" sz="2800" i="1">
+                        <a:rPr lang="el-GR" sz="2800" i="1" smtClean="0">
                           <a:solidFill>
-                            <a:schemeClr val="bg1"/>
+                            <a:srgbClr val="FF0000"/>
                           </a:solidFill>
                           <a:latin typeface="Cambria Math" panose="02040503050406030204" pitchFamily="18" charset="0"/>
                           <a:ea typeface="Verdana" panose="020B0604030504040204" pitchFamily="34" charset="0"/>
@@ -33951,7 +34610,7 @@
           <a:noFill/>
           <a:ln w="38100">
             <a:solidFill>
-              <a:srgbClr val="FFFF00"/>
+              <a:srgbClr val="FFC000"/>
             </a:solidFill>
           </a:ln>
         </p:spPr>
@@ -34002,7 +34661,7 @@
           <a:noFill/>
           <a:ln w="38100">
             <a:solidFill>
-              <a:srgbClr val="92D050"/>
+              <a:srgbClr val="FFFF00"/>
             </a:solidFill>
           </a:ln>
         </p:spPr>
@@ -34053,7 +34712,7 @@
           <a:noFill/>
           <a:ln w="38100">
             <a:solidFill>
-              <a:srgbClr val="00B050"/>
+              <a:srgbClr val="92D050"/>
             </a:solidFill>
           </a:ln>
         </p:spPr>
@@ -34083,24 +34742,22 @@
       </p:sp>
       <p:sp>
         <p:nvSpPr>
-          <p:cNvPr id="85" name="5-конечная звезда 84"/>
+          <p:cNvPr id="85" name="Овал 84"/>
           <p:cNvSpPr/>
           <p:nvPr/>
         </p:nvSpPr>
         <p:spPr>
           <a:xfrm>
-            <a:off x="9351856" y="3960348"/>
+            <a:off x="9336360" y="4005064"/>
             <a:ext cx="266700" cy="276225"/>
           </a:xfrm>
-          <a:prstGeom prst="star5">
+          <a:prstGeom prst="ellipse">
             <a:avLst/>
           </a:prstGeom>
-          <a:solidFill>
-            <a:srgbClr val="FF0000"/>
-          </a:solidFill>
+          <a:noFill/>
           <a:ln>
             <a:solidFill>
-              <a:srgbClr val="FF0000"/>
+              <a:srgbClr val="00B050"/>
             </a:solidFill>
           </a:ln>
         </p:spPr>
@@ -34359,7 +35016,7 @@
           <a:noFill/>
           <a:ln w="38100">
             <a:solidFill>
-              <a:srgbClr val="FFFF00"/>
+              <a:srgbClr val="FFC000"/>
             </a:solidFill>
           </a:ln>
         </p:spPr>
@@ -34410,7 +35067,7 @@
           <a:noFill/>
           <a:ln w="38100">
             <a:solidFill>
-              <a:srgbClr val="92D050"/>
+              <a:srgbClr val="FFFF00"/>
             </a:solidFill>
           </a:ln>
         </p:spPr>
@@ -34461,7 +35118,7 @@
           <a:noFill/>
           <a:ln w="38100">
             <a:solidFill>
-              <a:srgbClr val="00B050"/>
+              <a:srgbClr val="92D050"/>
             </a:solidFill>
           </a:ln>
         </p:spPr>
@@ -34491,24 +35148,22 @@
       </p:sp>
       <p:sp>
         <p:nvSpPr>
-          <p:cNvPr id="93" name="5-конечная звезда 92"/>
+          <p:cNvPr id="93" name="Овал 92"/>
           <p:cNvSpPr/>
           <p:nvPr/>
         </p:nvSpPr>
         <p:spPr>
           <a:xfrm>
-            <a:off x="3231176" y="3816332"/>
+            <a:off x="3215680" y="3861048"/>
             <a:ext cx="266700" cy="276225"/>
           </a:xfrm>
-          <a:prstGeom prst="star5">
+          <a:prstGeom prst="ellipse">
             <a:avLst/>
           </a:prstGeom>
-          <a:solidFill>
-            <a:srgbClr val="FF0000"/>
-          </a:solidFill>
+          <a:noFill/>
           <a:ln>
             <a:solidFill>
-              <a:srgbClr val="FF0000"/>
+              <a:srgbClr val="00B050"/>
             </a:solidFill>
           </a:ln>
         </p:spPr>
@@ -34645,7 +35300,7 @@
     </p:spTree>
     <p:extLst>
       <p:ext uri="{BB962C8B-B14F-4D97-AF65-F5344CB8AC3E}">
-        <p14:creationId xmlns:p14="http://schemas.microsoft.com/office/powerpoint/2010/main" val="2456353050"/>
+        <p14:creationId xmlns:p14="http://schemas.microsoft.com/office/powerpoint/2010/main" val="321223330"/>
       </p:ext>
     </p:extLst>
   </p:cSld>
